--- a/decks/Micro_01_Specimen-Selection-Collection-Rejection.pptx
+++ b/decks/Micro_01_Specimen-Selection-Collection-Rejection.pptx
@@ -25,9 +25,13 @@
     <p:sldId id="273" r:id="rId19"/>
     <p:sldId id="274" r:id="rId20"/>
     <p:sldId id="275" r:id="rId21"/>
+    <p:sldId id="284" r:id="rId35"/>
     <p:sldId id="276" r:id="rId22"/>
+    <p:sldId id="283" r:id="rId34"/>
     <p:sldId id="277" r:id="rId23"/>
+    <p:sldId id="282" r:id="rId33"/>
     <p:sldId id="278" r:id="rId24"/>
+    <p:sldId id="281" r:id="rId32"/>
     <p:sldId id="279" r:id="rId25"/>
     <p:sldId id="280" r:id="rId26"/>
   </p:sldIdLst>
@@ -3032,6 +3036,10 @@
           </a:solidFill>
           <a:ln/>
         </p:spPr>
+        <p:txBody>
+          <a:bodyPr/>
+          <a:p/>
+        </p:txBody>
       </p:sp>
       <p:sp>
         <p:nvSpPr>
@@ -3054,6 +3062,10 @@
           </a:solidFill>
           <a:ln/>
         </p:spPr>
+        <p:txBody>
+          <a:bodyPr/>
+          <a:p/>
+        </p:txBody>
       </p:sp>
       <p:sp>
         <p:nvSpPr>
@@ -3076,6 +3088,10 @@
           </a:solidFill>
           <a:ln/>
         </p:spPr>
+        <p:txBody>
+          <a:bodyPr/>
+          <a:p/>
+        </p:txBody>
       </p:sp>
       <p:sp>
         <p:nvSpPr>
@@ -3098,6 +3114,10 @@
           </a:solidFill>
           <a:ln/>
         </p:spPr>
+        <p:txBody>
+          <a:bodyPr/>
+          <a:p/>
+        </p:txBody>
       </p:sp>
       <p:sp>
         <p:nvSpPr>
@@ -3514,6 +3534,10 @@
             </a:outerShdw>
           </a:effectLst>
         </p:spPr>
+        <p:txBody>
+          <a:bodyPr/>
+          <a:p/>
+        </p:txBody>
       </p:sp>
       <p:sp>
         <p:nvSpPr>
@@ -3688,6 +3712,10 @@
             </a:outerShdw>
           </a:effectLst>
         </p:spPr>
+        <p:txBody>
+          <a:bodyPr/>
+          <a:p/>
+        </p:txBody>
       </p:sp>
       <p:sp>
         <p:nvSpPr>
@@ -4078,6 +4106,10 @@
             </a:outerShdw>
           </a:effectLst>
         </p:spPr>
+        <p:txBody>
+          <a:bodyPr/>
+          <a:p/>
+        </p:txBody>
       </p:sp>
       <p:sp>
         <p:nvSpPr>
@@ -4252,6 +4284,10 @@
             </a:outerShdw>
           </a:effectLst>
         </p:spPr>
+        <p:txBody>
+          <a:bodyPr/>
+          <a:p/>
+        </p:txBody>
       </p:sp>
       <p:sp>
         <p:nvSpPr>
@@ -6079,6 +6115,10 @@
           </a:solidFill>
           <a:ln/>
         </p:spPr>
+        <p:txBody>
+          <a:bodyPr/>
+          <a:p/>
+        </p:txBody>
       </p:sp>
       <p:sp>
         <p:nvSpPr>
@@ -6101,6 +6141,10 @@
           </a:solidFill>
           <a:ln/>
         </p:spPr>
+        <p:txBody>
+          <a:bodyPr/>
+          <a:p/>
+        </p:txBody>
       </p:sp>
       <p:sp>
         <p:nvSpPr>
@@ -6357,6 +6401,10 @@
             </a:outerShdw>
           </a:effectLst>
         </p:spPr>
+        <p:txBody>
+          <a:bodyPr/>
+          <a:p/>
+        </p:txBody>
       </p:sp>
       <p:sp>
         <p:nvSpPr>
@@ -6467,6 +6515,10 @@
             </a:outerShdw>
           </a:effectLst>
         </p:spPr>
+        <p:txBody>
+          <a:bodyPr/>
+          <a:p/>
+        </p:txBody>
       </p:sp>
       <p:sp>
         <p:nvSpPr>
@@ -6896,6 +6948,10 @@
             </a:outerShdw>
           </a:effectLst>
         </p:spPr>
+        <p:txBody>
+          <a:bodyPr/>
+          <a:p/>
+        </p:txBody>
       </p:sp>
       <p:sp>
         <p:nvSpPr>
@@ -7222,6 +7278,10 @@
             </a:outerShdw>
           </a:effectLst>
         </p:spPr>
+        <p:txBody>
+          <a:bodyPr/>
+          <a:p/>
+        </p:txBody>
       </p:sp>
       <p:sp>
         <p:nvSpPr>
@@ -7332,6 +7392,10 @@
             </a:outerShdw>
           </a:effectLst>
         </p:spPr>
+        <p:txBody>
+          <a:bodyPr/>
+          <a:p/>
+        </p:txBody>
       </p:sp>
       <p:sp>
         <p:nvSpPr>
@@ -7761,6 +7825,10 @@
             </a:outerShdw>
           </a:effectLst>
         </p:spPr>
+        <p:txBody>
+          <a:bodyPr/>
+          <a:p/>
+        </p:txBody>
       </p:sp>
       <p:sp>
         <p:nvSpPr>
@@ -8087,6 +8155,10 @@
             </a:outerShdw>
           </a:effectLst>
         </p:spPr>
+        <p:txBody>
+          <a:bodyPr/>
+          <a:p/>
+        </p:txBody>
       </p:sp>
       <p:sp>
         <p:nvSpPr>
@@ -8197,6 +8269,10 @@
             </a:outerShdw>
           </a:effectLst>
         </p:spPr>
+        <p:txBody>
+          <a:bodyPr/>
+          <a:p/>
+        </p:txBody>
       </p:sp>
       <p:sp>
         <p:nvSpPr>
@@ -8626,6 +8702,10 @@
             </a:outerShdw>
           </a:effectLst>
         </p:spPr>
+        <p:txBody>
+          <a:bodyPr/>
+          <a:p/>
+        </p:txBody>
       </p:sp>
       <p:sp>
         <p:nvSpPr>
@@ -8952,6 +9032,10 @@
             </a:outerShdw>
           </a:effectLst>
         </p:spPr>
+        <p:txBody>
+          <a:bodyPr/>
+          <a:p/>
+        </p:txBody>
       </p:sp>
       <p:sp>
         <p:nvSpPr>
@@ -9059,6 +9143,10 @@
             </a:outerShdw>
           </a:effectLst>
         </p:spPr>
+        <p:txBody>
+          <a:bodyPr/>
+          <a:p/>
+        </p:txBody>
       </p:sp>
       <p:sp>
         <p:nvSpPr>
@@ -9166,6 +9254,10 @@
             </a:outerShdw>
           </a:effectLst>
         </p:spPr>
+        <p:txBody>
+          <a:bodyPr/>
+          <a:p/>
+        </p:txBody>
       </p:sp>
       <p:sp>
         <p:nvSpPr>
@@ -9273,6 +9365,10 @@
             </a:outerShdw>
           </a:effectLst>
         </p:spPr>
+        <p:txBody>
+          <a:bodyPr/>
+          <a:p/>
+        </p:txBody>
       </p:sp>
       <p:sp>
         <p:nvSpPr>
@@ -9665,9 +9761,9 @@
               <a:buNone/>
             </a:pPr>
             <a:r>
-              <a:rPr lang="en-US" sz="1350" b="1" dirty="0">
-                <a:solidFill>
-                  <a:srgbClr val="1F5722"/>
+              <a:rPr lang="en-US" sz="1350" b="0" dirty="0">
+                <a:solidFill>
+                  <a:srgbClr val="33444F"/>
                 </a:solidFill>
                 <a:latin typeface="Calibri" pitchFamily="34" charset="0"/>
                 <a:ea typeface="Calibri" pitchFamily="34" charset="-122"/>
@@ -9736,130 +9832,6 @@
               <a:t>E. Yeast only</a:t>
             </a:r>
             <a:endParaRPr lang="en-US" sz="1350" dirty="0"/>
-          </a:p>
-        </p:txBody>
-      </p:sp>
-      <p:sp>
-        <p:nvSpPr>
-          <p:cNvPr id="6" name="Shape 4"/>
-          <p:cNvSpPr/>
-          <p:nvPr/>
-        </p:nvSpPr>
-        <p:spPr>
-          <a:xfrm>
-            <a:off x="7201632" y="2395728"/>
-            <a:ext cx="4423136" cy="3246120"/>
-          </a:xfrm>
-          <a:prstGeom prst="roundRect">
-            <a:avLst>
-              <a:gd name="adj" fmla="val 2535"/>
-            </a:avLst>
-          </a:prstGeom>
-          <a:solidFill>
-            <a:srgbClr val="E8F2E9"/>
-          </a:solidFill>
-          <a:ln/>
-          <a:effectLst>
-            <a:outerShdw sx="100000" sy="100000" kx="0" ky="0" algn="bl" rotWithShape="0" blurRad="88900" dist="25400" dir="5400000">
-              <a:srgbClr val="22303C">
-                <a:alpha val="12000"/>
-              </a:srgbClr>
-            </a:outerShdw>
-          </a:effectLst>
-        </p:spPr>
-      </p:sp>
-      <p:sp>
-        <p:nvSpPr>
-          <p:cNvPr id="7" name="Text 5"/>
-          <p:cNvSpPr/>
-          <p:nvPr/>
-        </p:nvSpPr>
-        <p:spPr>
-          <a:xfrm>
-            <a:off x="7439376" y="2578608"/>
-            <a:ext cx="3965936" cy="457200"/>
-          </a:xfrm>
-          <a:prstGeom prst="rect">
-            <a:avLst/>
-          </a:prstGeom>
-          <a:noFill/>
-          <a:ln/>
-        </p:spPr>
-        <p:txBody>
-          <a:bodyPr wrap="square" lIns="0" tIns="0" rIns="0" bIns="0" rtlCol="0" anchor="ctr"/>
-          <a:lstStyle/>
-          <a:p>
-            <a:pPr indent="0" marL="0">
-              <a:buNone/>
-            </a:pPr>
-            <a:r>
-              <a:rPr lang="en-US" sz="1500" b="1" dirty="0">
-                <a:solidFill>
-                  <a:srgbClr val="2E7D32"/>
-                </a:solidFill>
-                <a:latin typeface="Calibri" pitchFamily="34" charset="0"/>
-                <a:ea typeface="Calibri" pitchFamily="34" charset="-122"/>
-                <a:cs typeface="Calibri" pitchFamily="34" charset="-120"/>
-              </a:rPr>
-              <a:t>ANSWER  </a:t>
-            </a:r>
-            <a:pPr indent="0" marL="0">
-              <a:buNone/>
-            </a:pPr>
-            <a:r>
-              <a:rPr lang="en-US" sz="1500" b="1" dirty="0">
-                <a:solidFill>
-                  <a:srgbClr val="1B2A38"/>
-                </a:solidFill>
-                <a:latin typeface="Calibri" pitchFamily="34" charset="0"/>
-                <a:ea typeface="Calibri" pitchFamily="34" charset="-122"/>
-                <a:cs typeface="Calibri" pitchFamily="34" charset="-120"/>
-              </a:rPr>
-              <a:t>B — Many PMNs, few squamous cells</a:t>
-            </a:r>
-            <a:endParaRPr lang="en-US" sz="1500" dirty="0"/>
-          </a:p>
-        </p:txBody>
-      </p:sp>
-      <p:sp>
-        <p:nvSpPr>
-          <p:cNvPr id="8" name="Text 6"/>
-          <p:cNvSpPr/>
-          <p:nvPr/>
-        </p:nvSpPr>
-        <p:spPr>
-          <a:xfrm>
-            <a:off x="7439376" y="3127248"/>
-            <a:ext cx="3947648" cy="2377440"/>
-          </a:xfrm>
-          <a:prstGeom prst="rect">
-            <a:avLst/>
-          </a:prstGeom>
-          <a:noFill/>
-          <a:ln/>
-        </p:spPr>
-        <p:txBody>
-          <a:bodyPr wrap="square" lIns="0" tIns="0" rIns="0" bIns="0" rtlCol="0" anchor="t"/>
-          <a:lstStyle/>
-          <a:p>
-            <a:pPr algn="l" indent="0" marL="0">
-              <a:lnSpc>
-                <a:spcPct val="108000"/>
-              </a:lnSpc>
-              <a:buNone/>
-            </a:pPr>
-            <a:r>
-              <a:rPr lang="en-US" sz="1250" dirty="0">
-                <a:solidFill>
-                  <a:srgbClr val="33444F"/>
-                </a:solidFill>
-                <a:latin typeface="Calibri" pitchFamily="34" charset="0"/>
-                <a:ea typeface="Calibri" pitchFamily="34" charset="-122"/>
-                <a:cs typeface="Calibri" pitchFamily="34" charset="-120"/>
-              </a:rPr>
-              <a:t>PMNs with few squamous epithelial cells indicate a true lower-respiratory specimen; abundant squamous cells indicate saliva.</a:t>
-            </a:r>
-            <a:endParaRPr lang="en-US" sz="1250" dirty="0"/>
           </a:p>
         </p:txBody>
       </p:sp>
@@ -10189,9 +10161,9 @@
               <a:buNone/>
             </a:pPr>
             <a:r>
-              <a:rPr lang="en-US" sz="1350" b="1" dirty="0">
-                <a:solidFill>
-                  <a:srgbClr val="1F5722"/>
+              <a:rPr lang="en-US" sz="1350" b="0" dirty="0">
+                <a:solidFill>
+                  <a:srgbClr val="33444F"/>
                 </a:solidFill>
                 <a:latin typeface="Calibri" pitchFamily="34" charset="0"/>
                 <a:ea typeface="Calibri" pitchFamily="34" charset="-122"/>
@@ -10240,130 +10212,6 @@
               <a:t>E. Sputum for routine culture</a:t>
             </a:r>
             <a:endParaRPr lang="en-US" sz="1350" dirty="0"/>
-          </a:p>
-        </p:txBody>
-      </p:sp>
-      <p:sp>
-        <p:nvSpPr>
-          <p:cNvPr id="6" name="Shape 4"/>
-          <p:cNvSpPr/>
-          <p:nvPr/>
-        </p:nvSpPr>
-        <p:spPr>
-          <a:xfrm>
-            <a:off x="7201632" y="2395728"/>
-            <a:ext cx="4423136" cy="3246120"/>
-          </a:xfrm>
-          <a:prstGeom prst="roundRect">
-            <a:avLst>
-              <a:gd name="adj" fmla="val 2535"/>
-            </a:avLst>
-          </a:prstGeom>
-          <a:solidFill>
-            <a:srgbClr val="E8F2E9"/>
-          </a:solidFill>
-          <a:ln/>
-          <a:effectLst>
-            <a:outerShdw sx="100000" sy="100000" kx="0" ky="0" algn="bl" rotWithShape="0" blurRad="88900" dist="25400" dir="5400000">
-              <a:srgbClr val="22303C">
-                <a:alpha val="12000"/>
-              </a:srgbClr>
-            </a:outerShdw>
-          </a:effectLst>
-        </p:spPr>
-      </p:sp>
-      <p:sp>
-        <p:nvSpPr>
-          <p:cNvPr id="7" name="Text 5"/>
-          <p:cNvSpPr/>
-          <p:nvPr/>
-        </p:nvSpPr>
-        <p:spPr>
-          <a:xfrm>
-            <a:off x="7439376" y="2578608"/>
-            <a:ext cx="3965936" cy="457200"/>
-          </a:xfrm>
-          <a:prstGeom prst="rect">
-            <a:avLst/>
-          </a:prstGeom>
-          <a:noFill/>
-          <a:ln/>
-        </p:spPr>
-        <p:txBody>
-          <a:bodyPr wrap="square" lIns="0" tIns="0" rIns="0" bIns="0" rtlCol="0" anchor="ctr"/>
-          <a:lstStyle/>
-          <a:p>
-            <a:pPr indent="0" marL="0">
-              <a:buNone/>
-            </a:pPr>
-            <a:r>
-              <a:rPr lang="en-US" sz="1500" b="1" dirty="0">
-                <a:solidFill>
-                  <a:srgbClr val="2E7D32"/>
-                </a:solidFill>
-                <a:latin typeface="Calibri" pitchFamily="34" charset="0"/>
-                <a:ea typeface="Calibri" pitchFamily="34" charset="-122"/>
-                <a:cs typeface="Calibri" pitchFamily="34" charset="-120"/>
-              </a:rPr>
-              <a:t>ANSWER  </a:t>
-            </a:r>
-            <a:pPr indent="0" marL="0">
-              <a:buNone/>
-            </a:pPr>
-            <a:r>
-              <a:rPr lang="en-US" sz="1500" b="1" dirty="0">
-                <a:solidFill>
-                  <a:srgbClr val="1B2A38"/>
-                </a:solidFill>
-                <a:latin typeface="Calibri" pitchFamily="34" charset="0"/>
-                <a:ea typeface="Calibri" pitchFamily="34" charset="-122"/>
-                <a:cs typeface="Calibri" pitchFamily="34" charset="-120"/>
-              </a:rPr>
-              <a:t>C — CSF for bacterial culture</a:t>
-            </a:r>
-            <a:endParaRPr lang="en-US" sz="1500" dirty="0"/>
-          </a:p>
-        </p:txBody>
-      </p:sp>
-      <p:sp>
-        <p:nvSpPr>
-          <p:cNvPr id="8" name="Text 6"/>
-          <p:cNvSpPr/>
-          <p:nvPr/>
-        </p:nvSpPr>
-        <p:spPr>
-          <a:xfrm>
-            <a:off x="7439376" y="3127248"/>
-            <a:ext cx="3947648" cy="2377440"/>
-          </a:xfrm>
-          <a:prstGeom prst="rect">
-            <a:avLst/>
-          </a:prstGeom>
-          <a:noFill/>
-          <a:ln/>
-        </p:spPr>
-        <p:txBody>
-          <a:bodyPr wrap="square" lIns="0" tIns="0" rIns="0" bIns="0" rtlCol="0" anchor="t"/>
-          <a:lstStyle/>
-          <a:p>
-            <a:pPr algn="l" indent="0" marL="0">
-              <a:lnSpc>
-                <a:spcPct val="108000"/>
-              </a:lnSpc>
-              <a:buNone/>
-            </a:pPr>
-            <a:r>
-              <a:rPr lang="en-US" sz="1250" dirty="0">
-                <a:solidFill>
-                  <a:srgbClr val="33444F"/>
-                </a:solidFill>
-                <a:latin typeface="Calibri" pitchFamily="34" charset="0"/>
-                <a:ea typeface="Calibri" pitchFamily="34" charset="-122"/>
-                <a:cs typeface="Calibri" pitchFamily="34" charset="-120"/>
-              </a:rPr>
-              <a:t>CSF for bacterial culture should be processed promptly at room temperature to preserve fastidious organisms (e.g., Neisseria, Haemophilus).</a:t>
-            </a:r>
-            <a:endParaRPr lang="en-US" sz="1250" dirty="0"/>
           </a:p>
         </p:txBody>
       </p:sp>
@@ -10693,9 +10541,9 @@
               <a:buNone/>
             </a:pPr>
             <a:r>
-              <a:rPr lang="en-US" sz="1350" b="1" dirty="0">
-                <a:solidFill>
-                  <a:srgbClr val="1F5722"/>
+              <a:rPr lang="en-US" sz="1350" b="0" dirty="0">
+                <a:solidFill>
+                  <a:srgbClr val="33444F"/>
                 </a:solidFill>
                 <a:latin typeface="Calibri" pitchFamily="34" charset="0"/>
                 <a:ea typeface="Calibri" pitchFamily="34" charset="-122"/>
@@ -10744,130 +10592,6 @@
               <a:t>E. Time of day drawn</a:t>
             </a:r>
             <a:endParaRPr lang="en-US" sz="1350" dirty="0"/>
-          </a:p>
-        </p:txBody>
-      </p:sp>
-      <p:sp>
-        <p:nvSpPr>
-          <p:cNvPr id="6" name="Shape 4"/>
-          <p:cNvSpPr/>
-          <p:nvPr/>
-        </p:nvSpPr>
-        <p:spPr>
-          <a:xfrm>
-            <a:off x="7201632" y="2395728"/>
-            <a:ext cx="4423136" cy="3246120"/>
-          </a:xfrm>
-          <a:prstGeom prst="roundRect">
-            <a:avLst>
-              <a:gd name="adj" fmla="val 2535"/>
-            </a:avLst>
-          </a:prstGeom>
-          <a:solidFill>
-            <a:srgbClr val="E8F2E9"/>
-          </a:solidFill>
-          <a:ln/>
-          <a:effectLst>
-            <a:outerShdw sx="100000" sy="100000" kx="0" ky="0" algn="bl" rotWithShape="0" blurRad="88900" dist="25400" dir="5400000">
-              <a:srgbClr val="22303C">
-                <a:alpha val="12000"/>
-              </a:srgbClr>
-            </a:outerShdw>
-          </a:effectLst>
-        </p:spPr>
-      </p:sp>
-      <p:sp>
-        <p:nvSpPr>
-          <p:cNvPr id="7" name="Text 5"/>
-          <p:cNvSpPr/>
-          <p:nvPr/>
-        </p:nvSpPr>
-        <p:spPr>
-          <a:xfrm>
-            <a:off x="7439376" y="2578608"/>
-            <a:ext cx="3965936" cy="457200"/>
-          </a:xfrm>
-          <a:prstGeom prst="rect">
-            <a:avLst/>
-          </a:prstGeom>
-          <a:noFill/>
-          <a:ln/>
-        </p:spPr>
-        <p:txBody>
-          <a:bodyPr wrap="square" lIns="0" tIns="0" rIns="0" bIns="0" rtlCol="0" anchor="ctr"/>
-          <a:lstStyle/>
-          <a:p>
-            <a:pPr indent="0" marL="0">
-              <a:buNone/>
-            </a:pPr>
-            <a:r>
-              <a:rPr lang="en-US" sz="1500" b="1" dirty="0">
-                <a:solidFill>
-                  <a:srgbClr val="2E7D32"/>
-                </a:solidFill>
-                <a:latin typeface="Calibri" pitchFamily="34" charset="0"/>
-                <a:ea typeface="Calibri" pitchFamily="34" charset="-122"/>
-                <a:cs typeface="Calibri" pitchFamily="34" charset="-120"/>
-              </a:rPr>
-              <a:t>ANSWER  </a:t>
-            </a:r>
-            <a:pPr indent="0" marL="0">
-              <a:buNone/>
-            </a:pPr>
-            <a:r>
-              <a:rPr lang="en-US" sz="1500" b="1" dirty="0">
-                <a:solidFill>
-                  <a:srgbClr val="1B2A38"/>
-                </a:solidFill>
-                <a:latin typeface="Calibri" pitchFamily="34" charset="0"/>
-                <a:ea typeface="Calibri" pitchFamily="34" charset="-122"/>
-                <a:cs typeface="Calibri" pitchFamily="34" charset="-120"/>
-              </a:rPr>
-              <a:t>C — Volume of blood cultured</a:t>
-            </a:r>
-            <a:endParaRPr lang="en-US" sz="1500" dirty="0"/>
-          </a:p>
-        </p:txBody>
-      </p:sp>
-      <p:sp>
-        <p:nvSpPr>
-          <p:cNvPr id="8" name="Text 6"/>
-          <p:cNvSpPr/>
-          <p:nvPr/>
-        </p:nvSpPr>
-        <p:spPr>
-          <a:xfrm>
-            <a:off x="7439376" y="3127248"/>
-            <a:ext cx="3947648" cy="2377440"/>
-          </a:xfrm>
-          <a:prstGeom prst="rect">
-            <a:avLst/>
-          </a:prstGeom>
-          <a:noFill/>
-          <a:ln/>
-        </p:spPr>
-        <p:txBody>
-          <a:bodyPr wrap="square" lIns="0" tIns="0" rIns="0" bIns="0" rtlCol="0" anchor="t"/>
-          <a:lstStyle/>
-          <a:p>
-            <a:pPr algn="l" indent="0" marL="0">
-              <a:lnSpc>
-                <a:spcPct val="108000"/>
-              </a:lnSpc>
-              <a:buNone/>
-            </a:pPr>
-            <a:r>
-              <a:rPr lang="en-US" sz="1250" dirty="0">
-                <a:solidFill>
-                  <a:srgbClr val="33444F"/>
-                </a:solidFill>
-                <a:latin typeface="Calibri" pitchFamily="34" charset="0"/>
-                <a:ea typeface="Calibri" pitchFamily="34" charset="-122"/>
-                <a:cs typeface="Calibri" pitchFamily="34" charset="-120"/>
-              </a:rPr>
-              <a:t>Yield is directly related to the blood volume inoculated; inadequate volume is the leading preventable cause of false-negative cultures.</a:t>
-            </a:r>
-            <a:endParaRPr lang="en-US" sz="1250" dirty="0"/>
           </a:p>
         </p:txBody>
       </p:sp>
@@ -11197,9 +10921,9 @@
               <a:buNone/>
             </a:pPr>
             <a:r>
-              <a:rPr lang="en-US" sz="1350" b="1" dirty="0">
-                <a:solidFill>
-                  <a:srgbClr val="1F5722"/>
+              <a:rPr lang="en-US" sz="1350" b="0" dirty="0">
+                <a:solidFill>
+                  <a:srgbClr val="33444F"/>
                 </a:solidFill>
                 <a:latin typeface="Calibri" pitchFamily="34" charset="0"/>
                 <a:ea typeface="Calibri" pitchFamily="34" charset="-122"/>
@@ -11248,130 +10972,6 @@
               <a:t>E. Reported with a disclaimer only</a:t>
             </a:r>
             <a:endParaRPr lang="en-US" sz="1350" dirty="0"/>
-          </a:p>
-        </p:txBody>
-      </p:sp>
-      <p:sp>
-        <p:nvSpPr>
-          <p:cNvPr id="6" name="Shape 4"/>
-          <p:cNvSpPr/>
-          <p:nvPr/>
-        </p:nvSpPr>
-        <p:spPr>
-          <a:xfrm>
-            <a:off x="7201632" y="2395728"/>
-            <a:ext cx="4423136" cy="3246120"/>
-          </a:xfrm>
-          <a:prstGeom prst="roundRect">
-            <a:avLst>
-              <a:gd name="adj" fmla="val 2535"/>
-            </a:avLst>
-          </a:prstGeom>
-          <a:solidFill>
-            <a:srgbClr val="E8F2E9"/>
-          </a:solidFill>
-          <a:ln/>
-          <a:effectLst>
-            <a:outerShdw sx="100000" sy="100000" kx="0" ky="0" algn="bl" rotWithShape="0" blurRad="88900" dist="25400" dir="5400000">
-              <a:srgbClr val="22303C">
-                <a:alpha val="12000"/>
-              </a:srgbClr>
-            </a:outerShdw>
-          </a:effectLst>
-        </p:spPr>
-      </p:sp>
-      <p:sp>
-        <p:nvSpPr>
-          <p:cNvPr id="7" name="Text 5"/>
-          <p:cNvSpPr/>
-          <p:nvPr/>
-        </p:nvSpPr>
-        <p:spPr>
-          <a:xfrm>
-            <a:off x="7439376" y="2578608"/>
-            <a:ext cx="3965936" cy="457200"/>
-          </a:xfrm>
-          <a:prstGeom prst="rect">
-            <a:avLst/>
-          </a:prstGeom>
-          <a:noFill/>
-          <a:ln/>
-        </p:spPr>
-        <p:txBody>
-          <a:bodyPr wrap="square" lIns="0" tIns="0" rIns="0" bIns="0" rtlCol="0" anchor="ctr"/>
-          <a:lstStyle/>
-          <a:p>
-            <a:pPr indent="0" marL="0">
-              <a:buNone/>
-            </a:pPr>
-            <a:r>
-              <a:rPr lang="en-US" sz="1500" b="1" dirty="0">
-                <a:solidFill>
-                  <a:srgbClr val="2E7D32"/>
-                </a:solidFill>
-                <a:latin typeface="Calibri" pitchFamily="34" charset="0"/>
-                <a:ea typeface="Calibri" pitchFamily="34" charset="-122"/>
-                <a:cs typeface="Calibri" pitchFamily="34" charset="-120"/>
-              </a:rPr>
-              <a:t>ANSWER  </a:t>
-            </a:r>
-            <a:pPr indent="0" marL="0">
-              <a:buNone/>
-            </a:pPr>
-            <a:r>
-              <a:rPr lang="en-US" sz="1500" b="1" dirty="0">
-                <a:solidFill>
-                  <a:srgbClr val="1B2A38"/>
-                </a:solidFill>
-                <a:latin typeface="Calibri" pitchFamily="34" charset="0"/>
-                <a:ea typeface="Calibri" pitchFamily="34" charset="-122"/>
-                <a:cs typeface="Calibri" pitchFamily="34" charset="-120"/>
-              </a:rPr>
-              <a:t>C — Rejected/recollected per policy</a:t>
-            </a:r>
-            <a:endParaRPr lang="en-US" sz="1500" dirty="0"/>
-          </a:p>
-        </p:txBody>
-      </p:sp>
-      <p:sp>
-        <p:nvSpPr>
-          <p:cNvPr id="8" name="Text 6"/>
-          <p:cNvSpPr/>
-          <p:nvPr/>
-        </p:nvSpPr>
-        <p:spPr>
-          <a:xfrm>
-            <a:off x="7439376" y="3127248"/>
-            <a:ext cx="3947648" cy="2377440"/>
-          </a:xfrm>
-          <a:prstGeom prst="rect">
-            <a:avLst/>
-          </a:prstGeom>
-          <a:noFill/>
-          <a:ln/>
-        </p:spPr>
-        <p:txBody>
-          <a:bodyPr wrap="square" lIns="0" tIns="0" rIns="0" bIns="0" rtlCol="0" anchor="t"/>
-          <a:lstStyle/>
-          <a:p>
-            <a:pPr algn="l" indent="0" marL="0">
-              <a:lnSpc>
-                <a:spcPct val="108000"/>
-              </a:lnSpc>
-              <a:buNone/>
-            </a:pPr>
-            <a:r>
-              <a:rPr lang="en-US" sz="1250" dirty="0">
-                <a:solidFill>
-                  <a:srgbClr val="33444F"/>
-                </a:solidFill>
-                <a:latin typeface="Calibri" pitchFamily="34" charset="0"/>
-                <a:ea typeface="Calibri" pitchFamily="34" charset="-122"/>
-                <a:cs typeface="Calibri" pitchFamily="34" charset="-120"/>
-              </a:rPr>
-              <a:t>Identity errors are a patient-safety issue; policy generally requires recollection, with special handling only for truly irreplaceable specimens after documented verification.</a:t>
-            </a:r>
-            <a:endParaRPr lang="en-US" sz="1250" dirty="0"/>
           </a:p>
         </p:txBody>
       </p:sp>
@@ -11612,6 +11212,10 @@
           </a:solidFill>
           <a:ln/>
         </p:spPr>
+        <p:txBody>
+          <a:bodyPr/>
+          <a:p/>
+        </p:txBody>
       </p:sp>
       <p:sp>
         <p:nvSpPr>
@@ -11639,6 +11243,10 @@
             </a:outerShdw>
           </a:effectLst>
         </p:spPr>
+        <p:txBody>
+          <a:bodyPr/>
+          <a:p/>
+        </p:txBody>
       </p:sp>
       <p:sp>
         <p:nvSpPr>
@@ -11739,6 +11347,10 @@
           </a:solidFill>
           <a:ln/>
         </p:spPr>
+        <p:txBody>
+          <a:bodyPr/>
+          <a:p/>
+        </p:txBody>
       </p:sp>
       <p:sp>
         <p:nvSpPr>
@@ -11766,6 +11378,10 @@
             </a:outerShdw>
           </a:effectLst>
         </p:spPr>
+        <p:txBody>
+          <a:bodyPr/>
+          <a:p/>
+        </p:txBody>
       </p:sp>
       <p:sp>
         <p:nvSpPr>
@@ -11866,6 +11482,10 @@
           </a:solidFill>
           <a:ln/>
         </p:spPr>
+        <p:txBody>
+          <a:bodyPr/>
+          <a:p/>
+        </p:txBody>
       </p:sp>
       <p:sp>
         <p:nvSpPr>
@@ -11893,6 +11513,10 @@
             </a:outerShdw>
           </a:effectLst>
         </p:spPr>
+        <p:txBody>
+          <a:bodyPr/>
+          <a:p/>
+        </p:txBody>
       </p:sp>
       <p:sp>
         <p:nvSpPr>
@@ -11993,6 +11617,10 @@
           </a:solidFill>
           <a:ln/>
         </p:spPr>
+        <p:txBody>
+          <a:bodyPr/>
+          <a:p/>
+        </p:txBody>
       </p:sp>
       <p:sp>
         <p:nvSpPr>
@@ -12020,6 +11648,10 @@
             </a:outerShdw>
           </a:effectLst>
         </p:spPr>
+        <p:txBody>
+          <a:bodyPr/>
+          <a:p/>
+        </p:txBody>
       </p:sp>
       <p:sp>
         <p:nvSpPr>
@@ -12120,6 +11752,10 @@
           </a:solidFill>
           <a:ln/>
         </p:spPr>
+        <p:txBody>
+          <a:bodyPr/>
+          <a:p/>
+        </p:txBody>
       </p:sp>
       <p:sp>
         <p:nvSpPr>
@@ -12147,6 +11783,10 @@
             </a:outerShdw>
           </a:effectLst>
         </p:spPr>
+        <p:txBody>
+          <a:bodyPr/>
+          <a:p/>
+        </p:txBody>
       </p:sp>
       <p:sp>
         <p:nvSpPr>
@@ -12630,6 +12270,1982 @@
 </p:sld>
 </file>
 
+<file path=ppt/slides/slide26.xml><?xml version="1.0" encoding="utf-8"?>
+<p:sld xmlns:a="http://schemas.openxmlformats.org/drawingml/2006/main" xmlns:p="http://schemas.openxmlformats.org/presentationml/2006/main" xmlns:r="http://schemas.openxmlformats.org/officeDocument/2006/relationships">
+  <p:cSld>
+    <p:spTree>
+      <p:nvGrpSpPr>
+        <p:cNvPr id="1" name=""/>
+        <p:cNvGrpSpPr/>
+        <p:nvPr/>
+      </p:nvGrpSpPr>
+      <p:grpSpPr/>
+      <p:sp>
+        <p:nvSpPr>
+          <p:cNvPr id="2" name="Text 0"/>
+          <p:cNvSpPr/>
+          <p:nvPr/>
+        </p:nvSpPr>
+        <p:spPr>
+          <a:xfrm>
+            <a:off x="566928" y="329184"/>
+            <a:ext cx="10515600" cy="310896"/>
+          </a:xfrm>
+          <a:prstGeom prst="rect">
+            <a:avLst/>
+          </a:prstGeom>
+          <a:noFill/>
+          <a:ln/>
+        </p:spPr>
+        <p:txBody>
+          <a:bodyPr wrap="square" lIns="0" tIns="0" rIns="0" bIns="0" rtlCol="0" anchor="ctr"/>
+          <a:lstStyle/>
+          <a:p>
+            <a:pPr algn="l" indent="0" marL="0">
+              <a:buNone/>
+            </a:pPr>
+            <a:r>
+              <a:rPr lang="en-US" sz="1100" b="1" spc="150" kern="0" dirty="0">
+                <a:solidFill>
+                  <a:srgbClr val="2E7D32"/>
+                </a:solidFill>
+                <a:latin typeface="Calibri" pitchFamily="34" charset="0"/>
+                <a:ea typeface="Calibri" pitchFamily="34" charset="-122"/>
+                <a:cs typeface="Calibri" pitchFamily="34" charset="-120"/>
+              </a:rPr>
+              <a:t>MICROBIOLOGY   ·   BOARD REVIEW  ·  Q4</a:t>
+            </a:r>
+            <a:endParaRPr lang="en-US" sz="1100" dirty="0"/>
+          </a:p>
+        </p:txBody>
+      </p:sp>
+      <p:sp>
+        <p:nvSpPr>
+          <p:cNvPr id="3" name="Text 1"/>
+          <p:cNvSpPr/>
+          <p:nvPr/>
+        </p:nvSpPr>
+        <p:spPr>
+          <a:xfrm>
+            <a:off x="566928" y="713232"/>
+            <a:ext cx="11064240" cy="749808"/>
+          </a:xfrm>
+          <a:prstGeom prst="rect">
+            <a:avLst/>
+          </a:prstGeom>
+          <a:noFill/>
+          <a:ln/>
+        </p:spPr>
+        <p:txBody>
+          <a:bodyPr wrap="square" lIns="0" tIns="0" rIns="0" bIns="0" rtlCol="0" anchor="ctr"/>
+          <a:lstStyle/>
+          <a:p>
+            <a:pPr algn="l" indent="0" marL="0">
+              <a:buNone/>
+            </a:pPr>
+            <a:r>
+              <a:rPr lang="en-US" sz="2600" b="1" dirty="0">
+                <a:solidFill>
+                  <a:srgbClr val="0E3A5F"/>
+                </a:solidFill>
+                <a:latin typeface="Calibri" pitchFamily="34" charset="0"/>
+                <a:ea typeface="Calibri" pitchFamily="34" charset="-122"/>
+                <a:cs typeface="Calibri" pitchFamily="34" charset="-120"/>
+              </a:rPr>
+              <a:t>Board-Style Review</a:t>
+            </a:r>
+            <a:endParaRPr lang="en-US" sz="2600" dirty="0"/>
+          </a:p>
+        </p:txBody>
+      </p:sp>
+      <p:sp>
+        <p:nvSpPr>
+          <p:cNvPr id="4" name="Text 2"/>
+          <p:cNvSpPr/>
+          <p:nvPr/>
+        </p:nvSpPr>
+        <p:spPr>
+          <a:xfrm>
+            <a:off x="566928" y="1417320"/>
+            <a:ext cx="11057839" cy="914400"/>
+          </a:xfrm>
+          <a:prstGeom prst="rect">
+            <a:avLst/>
+          </a:prstGeom>
+          <a:noFill/>
+          <a:ln/>
+        </p:spPr>
+        <p:txBody>
+          <a:bodyPr wrap="square" lIns="0" tIns="0" rIns="0" bIns="0" rtlCol="0" anchor="t"/>
+          <a:lstStyle/>
+          <a:p>
+            <a:pPr algn="l" indent="0" marL="0">
+              <a:lnSpc>
+                <a:spcPct val="105000"/>
+              </a:lnSpc>
+              <a:buNone/>
+            </a:pPr>
+            <a:r>
+              <a:rPr lang="en-US" sz="1450" b="1" dirty="0">
+                <a:solidFill>
+                  <a:srgbClr val="1B2A38"/>
+                </a:solidFill>
+                <a:latin typeface="Calibri" pitchFamily="34" charset="0"/>
+                <a:ea typeface="Calibri" pitchFamily="34" charset="-122"/>
+                <a:cs typeface="Calibri" pitchFamily="34" charset="-120"/>
+              </a:rPr>
+              <a:t>A mislabeled specimen from a sterile site (e.g., CSF) should generally be:</a:t>
+            </a:r>
+            <a:endParaRPr lang="en-US" sz="1450" dirty="0"/>
+          </a:p>
+        </p:txBody>
+      </p:sp>
+      <p:sp>
+        <p:nvSpPr>
+          <p:cNvPr id="5" name="Text 3"/>
+          <p:cNvSpPr/>
+          <p:nvPr/>
+        </p:nvSpPr>
+        <p:spPr>
+          <a:xfrm>
+            <a:off x="658368" y="2395728"/>
+            <a:ext cx="6192390" cy="3017520"/>
+          </a:xfrm>
+          <a:prstGeom prst="rect">
+            <a:avLst/>
+          </a:prstGeom>
+          <a:noFill/>
+          <a:ln/>
+        </p:spPr>
+        <p:txBody>
+          <a:bodyPr wrap="square" lIns="0" tIns="0" rIns="0" bIns="0" rtlCol="0" anchor="t"/>
+          <a:lstStyle/>
+          <a:p>
+            <a:pPr algn="l" indent="0" marL="0">
+              <a:spcAft>
+                <a:spcPts val="600"/>
+              </a:spcAft>
+              <a:buNone/>
+            </a:pPr>
+            <a:r>
+              <a:rPr lang="en-US" sz="1350" dirty="0">
+                <a:solidFill>
+                  <a:srgbClr val="33444F"/>
+                </a:solidFill>
+                <a:latin typeface="Calibri" pitchFamily="34" charset="0"/>
+                <a:ea typeface="Calibri" pitchFamily="34" charset="-122"/>
+                <a:cs typeface="Calibri" pitchFamily="34" charset="-120"/>
+              </a:rPr>
+              <a:t>A. Processed and reported normally</a:t>
+            </a:r>
+            <a:endParaRPr lang="en-US" sz="1350" dirty="0"/>
+          </a:p>
+          <a:p>
+            <a:pPr algn="l" indent="0" marL="0">
+              <a:spcAft>
+                <a:spcPts val="600"/>
+              </a:spcAft>
+              <a:buNone/>
+            </a:pPr>
+            <a:r>
+              <a:rPr lang="en-US" sz="1350" dirty="0">
+                <a:solidFill>
+                  <a:srgbClr val="33444F"/>
+                </a:solidFill>
+                <a:latin typeface="Calibri" pitchFamily="34" charset="0"/>
+                <a:ea typeface="Calibri" pitchFamily="34" charset="-122"/>
+                <a:cs typeface="Calibri" pitchFamily="34" charset="-120"/>
+              </a:rPr>
+              <a:t>B. Relabeled by the technologist</a:t>
+            </a:r>
+            <a:endParaRPr lang="en-US" sz="1350" dirty="0"/>
+          </a:p>
+          <a:p>
+            <a:pPr algn="l" indent="0" marL="0">
+              <a:spcAft>
+                <a:spcPts val="600"/>
+              </a:spcAft>
+              <a:buNone/>
+            </a:pPr>
+            <a:r>
+              <a:rPr lang="en-US" sz="1350" b="1" dirty="0">
+                <a:solidFill>
+                  <a:srgbClr val="1F5722"/>
+                </a:solidFill>
+                <a:latin typeface="Calibri" pitchFamily="34" charset="0"/>
+                <a:ea typeface="Calibri" pitchFamily="34" charset="-122"/>
+                <a:cs typeface="Calibri" pitchFamily="34" charset="-120"/>
+              </a:rPr>
+              <a:t>C. Rejected with a request to recollect, balancing the difficulty of recollection</a:t>
+            </a:r>
+            <a:endParaRPr lang="en-US" sz="1350" dirty="0"/>
+          </a:p>
+          <a:p>
+            <a:pPr algn="l" indent="0" marL="0">
+              <a:spcAft>
+                <a:spcPts val="600"/>
+              </a:spcAft>
+              <a:buNone/>
+            </a:pPr>
+            <a:r>
+              <a:rPr lang="en-US" sz="1350" dirty="0">
+                <a:solidFill>
+                  <a:srgbClr val="33444F"/>
+                </a:solidFill>
+                <a:latin typeface="Calibri" pitchFamily="34" charset="0"/>
+                <a:ea typeface="Calibri" pitchFamily="34" charset="-122"/>
+                <a:cs typeface="Calibri" pitchFamily="34" charset="-120"/>
+              </a:rPr>
+              <a:t>D. Discarded silently</a:t>
+            </a:r>
+            <a:endParaRPr lang="en-US" sz="1350" dirty="0"/>
+          </a:p>
+          <a:p>
+            <a:pPr algn="l" indent="0" marL="0">
+              <a:spcAft>
+                <a:spcPts val="600"/>
+              </a:spcAft>
+              <a:buNone/>
+            </a:pPr>
+            <a:r>
+              <a:rPr lang="en-US" sz="1350" dirty="0">
+                <a:solidFill>
+                  <a:srgbClr val="33444F"/>
+                </a:solidFill>
+                <a:latin typeface="Calibri" pitchFamily="34" charset="0"/>
+                <a:ea typeface="Calibri" pitchFamily="34" charset="-122"/>
+                <a:cs typeface="Calibri" pitchFamily="34" charset="-120"/>
+              </a:rPr>
+              <a:t>E. Reported with a disclaimer only</a:t>
+            </a:r>
+            <a:endParaRPr lang="en-US" sz="1350" dirty="0"/>
+          </a:p>
+        </p:txBody>
+      </p:sp>
+      <p:sp>
+        <p:nvSpPr>
+          <p:cNvPr id="6" name="Shape 4"/>
+          <p:cNvSpPr/>
+          <p:nvPr/>
+        </p:nvSpPr>
+        <p:spPr>
+          <a:xfrm>
+            <a:off x="7201632" y="2395728"/>
+            <a:ext cx="4423136" cy="3246120"/>
+          </a:xfrm>
+          <a:prstGeom prst="roundRect">
+            <a:avLst>
+              <a:gd name="adj" fmla="val 2535"/>
+            </a:avLst>
+          </a:prstGeom>
+          <a:solidFill>
+            <a:srgbClr val="E8F2E9"/>
+          </a:solidFill>
+          <a:ln/>
+          <a:effectLst>
+            <a:outerShdw sx="100000" sy="100000" kx="0" ky="0" algn="bl" rotWithShape="0" blurRad="88900" dist="25400" dir="5400000">
+              <a:srgbClr val="22303C">
+                <a:alpha val="12000"/>
+              </a:srgbClr>
+            </a:outerShdw>
+          </a:effectLst>
+        </p:spPr>
+        <p:txBody>
+          <a:bodyPr/>
+          <a:p/>
+        </p:txBody>
+      </p:sp>
+      <p:sp>
+        <p:nvSpPr>
+          <p:cNvPr id="7" name="Text 5"/>
+          <p:cNvSpPr/>
+          <p:nvPr/>
+        </p:nvSpPr>
+        <p:spPr>
+          <a:xfrm>
+            <a:off x="7439376" y="2578608"/>
+            <a:ext cx="3965936" cy="457200"/>
+          </a:xfrm>
+          <a:prstGeom prst="rect">
+            <a:avLst/>
+          </a:prstGeom>
+          <a:noFill/>
+          <a:ln/>
+        </p:spPr>
+        <p:txBody>
+          <a:bodyPr wrap="square" lIns="0" tIns="0" rIns="0" bIns="0" rtlCol="0" anchor="ctr"/>
+          <a:lstStyle/>
+          <a:p>
+            <a:pPr indent="0" marL="0">
+              <a:buNone/>
+            </a:pPr>
+            <a:r>
+              <a:rPr lang="en-US" sz="1500" b="1" dirty="0">
+                <a:solidFill>
+                  <a:srgbClr val="2E7D32"/>
+                </a:solidFill>
+                <a:latin typeface="Calibri" pitchFamily="34" charset="0"/>
+                <a:ea typeface="Calibri" pitchFamily="34" charset="-122"/>
+                <a:cs typeface="Calibri" pitchFamily="34" charset="-120"/>
+              </a:rPr>
+              <a:t>ANSWER  </a:t>
+            </a:r>
+            <a:pPr indent="0" marL="0">
+              <a:buNone/>
+            </a:pPr>
+            <a:r>
+              <a:rPr lang="en-US" sz="1500" b="1" dirty="0">
+                <a:solidFill>
+                  <a:srgbClr val="1B2A38"/>
+                </a:solidFill>
+                <a:latin typeface="Calibri" pitchFamily="34" charset="0"/>
+                <a:ea typeface="Calibri" pitchFamily="34" charset="-122"/>
+                <a:cs typeface="Calibri" pitchFamily="34" charset="-120"/>
+              </a:rPr>
+              <a:t>C — Rejected/recollected per policy</a:t>
+            </a:r>
+            <a:endParaRPr lang="en-US" sz="1500" dirty="0"/>
+          </a:p>
+        </p:txBody>
+      </p:sp>
+      <p:sp>
+        <p:nvSpPr>
+          <p:cNvPr id="8" name="Text 6"/>
+          <p:cNvSpPr/>
+          <p:nvPr/>
+        </p:nvSpPr>
+        <p:spPr>
+          <a:xfrm>
+            <a:off x="7439376" y="3127248"/>
+            <a:ext cx="3947648" cy="2377440"/>
+          </a:xfrm>
+          <a:prstGeom prst="rect">
+            <a:avLst/>
+          </a:prstGeom>
+          <a:noFill/>
+          <a:ln/>
+        </p:spPr>
+        <p:txBody>
+          <a:bodyPr wrap="square" lIns="0" tIns="0" rIns="0" bIns="0" rtlCol="0" anchor="t"/>
+          <a:lstStyle/>
+          <a:p>
+            <a:pPr algn="l" indent="0" marL="0">
+              <a:lnSpc>
+                <a:spcPct val="108000"/>
+              </a:lnSpc>
+              <a:buNone/>
+            </a:pPr>
+            <a:r>
+              <a:rPr lang="en-US" sz="1250" dirty="0">
+                <a:solidFill>
+                  <a:srgbClr val="33444F"/>
+                </a:solidFill>
+                <a:latin typeface="Calibri" pitchFamily="34" charset="0"/>
+                <a:ea typeface="Calibri" pitchFamily="34" charset="-122"/>
+                <a:cs typeface="Calibri" pitchFamily="34" charset="-120"/>
+              </a:rPr>
+              <a:t>Identity errors are a patient-safety issue; policy generally requires recollection, with special handling only for truly irreplaceable specimens after documented verification.</a:t>
+            </a:r>
+            <a:endParaRPr lang="en-US" sz="1250" dirty="0"/>
+          </a:p>
+        </p:txBody>
+      </p:sp>
+      <p:sp>
+        <p:nvSpPr>
+          <p:cNvPr id="9" name="Text 7"/>
+          <p:cNvSpPr/>
+          <p:nvPr/>
+        </p:nvSpPr>
+        <p:spPr>
+          <a:xfrm>
+            <a:off x="566928" y="6473952"/>
+            <a:ext cx="7772400" cy="274320"/>
+          </a:xfrm>
+          <a:prstGeom prst="rect">
+            <a:avLst/>
+          </a:prstGeom>
+          <a:noFill/>
+          <a:ln/>
+        </p:spPr>
+        <p:txBody>
+          <a:bodyPr wrap="square" lIns="0" tIns="0" rIns="0" bIns="0" rtlCol="0" anchor="ctr"/>
+          <a:lstStyle/>
+          <a:p>
+            <a:pPr algn="l" indent="0" marL="0">
+              <a:buNone/>
+            </a:pPr>
+            <a:r>
+              <a:rPr lang="en-US" sz="850" dirty="0">
+                <a:solidFill>
+                  <a:srgbClr val="9AA8B4"/>
+                </a:solidFill>
+                <a:latin typeface="Calibri" pitchFamily="34" charset="0"/>
+                <a:ea typeface="Calibri" pitchFamily="34" charset="-122"/>
+                <a:cs typeface="Calibri" pitchFamily="34" charset="-120"/>
+              </a:rPr>
+              <a:t>Makassed General Hospital  ·  Department of Laboratory Medicine</a:t>
+            </a:r>
+            <a:endParaRPr lang="en-US" sz="850" dirty="0"/>
+          </a:p>
+        </p:txBody>
+      </p:sp>
+      <p:sp>
+        <p:nvSpPr>
+          <p:cNvPr id="10" name="Text 8"/>
+          <p:cNvSpPr/>
+          <p:nvPr/>
+        </p:nvSpPr>
+        <p:spPr>
+          <a:xfrm>
+            <a:off x="9814255" y="6473952"/>
+            <a:ext cx="1828800" cy="274320"/>
+          </a:xfrm>
+          <a:prstGeom prst="rect">
+            <a:avLst/>
+          </a:prstGeom>
+          <a:noFill/>
+          <a:ln/>
+        </p:spPr>
+        <p:txBody>
+          <a:bodyPr wrap="square" lIns="0" tIns="0" rIns="0" bIns="0" rtlCol="0" anchor="ctr"/>
+          <a:lstStyle/>
+          <a:p>
+            <a:pPr algn="r" indent="0" marL="0">
+              <a:buNone/>
+            </a:pPr>
+            <a:r>
+              <a:rPr lang="en-US" sz="850" dirty="0">
+                <a:solidFill>
+                  <a:srgbClr val="9AA8B4"/>
+                </a:solidFill>
+                <a:latin typeface="Calibri" pitchFamily="34" charset="0"/>
+                <a:ea typeface="Calibri" pitchFamily="34" charset="-122"/>
+                <a:cs typeface="Calibri" pitchFamily="34" charset="-120"/>
+              </a:rPr>
+              <a:t>CP Lecture Series</a:t>
+            </a:r>
+            <a:pPr algn="r" indent="0" marL="0">
+              <a:buNone/>
+            </a:pPr>
+            <a:r>
+              <a:rPr lang="en-US" sz="850" dirty="0">
+                <a:solidFill>
+                  <a:srgbClr val="DCE4EC"/>
+                </a:solidFill>
+                <a:latin typeface="Calibri" pitchFamily="34" charset="0"/>
+                <a:ea typeface="Calibri" pitchFamily="34" charset="-122"/>
+                <a:cs typeface="Calibri" pitchFamily="34" charset="-120"/>
+              </a:rPr>
+              <a:t>   ·   </a:t>
+            </a:r>
+            <a:pPr algn="r" indent="0" marL="0">
+              <a:buNone/>
+            </a:pPr>
+            <a:r>
+              <a:rPr lang="en-US" sz="850" b="1" dirty="0">
+                <a:solidFill>
+                  <a:srgbClr val="2E7D32"/>
+                </a:solidFill>
+                <a:latin typeface="Calibri" pitchFamily="34" charset="0"/>
+                <a:ea typeface="Calibri" pitchFamily="34" charset="-122"/>
+                <a:cs typeface="Calibri" pitchFamily="34" charset="-120"/>
+              </a:rPr>
+              <a:t>20</a:t>
+            </a:r>
+            <a:endParaRPr lang="en-US" sz="850" dirty="0"/>
+          </a:p>
+        </p:txBody>
+      </p:sp>
+    </p:spTree>
+  </p:cSld>
+  <p:clrMapOvr>
+    <a:masterClrMapping/>
+  </p:clrMapOvr>
+</p:sld>
+</file>
+
+<file path=ppt/slides/slide27.xml><?xml version="1.0" encoding="utf-8"?>
+<p:sld xmlns:a="http://schemas.openxmlformats.org/drawingml/2006/main" xmlns:p="http://schemas.openxmlformats.org/presentationml/2006/main" xmlns:r="http://schemas.openxmlformats.org/officeDocument/2006/relationships">
+  <p:cSld>
+    <p:spTree>
+      <p:nvGrpSpPr>
+        <p:cNvPr id="1" name=""/>
+        <p:cNvGrpSpPr/>
+        <p:nvPr/>
+      </p:nvGrpSpPr>
+      <p:grpSpPr/>
+      <p:sp>
+        <p:nvSpPr>
+          <p:cNvPr id="2" name="Text 0"/>
+          <p:cNvSpPr/>
+          <p:nvPr/>
+        </p:nvSpPr>
+        <p:spPr>
+          <a:xfrm>
+            <a:off x="566928" y="329184"/>
+            <a:ext cx="10515600" cy="310896"/>
+          </a:xfrm>
+          <a:prstGeom prst="rect">
+            <a:avLst/>
+          </a:prstGeom>
+          <a:noFill/>
+          <a:ln/>
+        </p:spPr>
+        <p:txBody>
+          <a:bodyPr wrap="square" lIns="0" tIns="0" rIns="0" bIns="0" rtlCol="0" anchor="ctr"/>
+          <a:lstStyle/>
+          <a:p>
+            <a:pPr algn="l" indent="0" marL="0">
+              <a:buNone/>
+            </a:pPr>
+            <a:r>
+              <a:rPr lang="en-US" sz="1100" b="1" spc="150" kern="0" dirty="0">
+                <a:solidFill>
+                  <a:srgbClr val="2E7D32"/>
+                </a:solidFill>
+                <a:latin typeface="Calibri" pitchFamily="34" charset="0"/>
+                <a:ea typeface="Calibri" pitchFamily="34" charset="-122"/>
+                <a:cs typeface="Calibri" pitchFamily="34" charset="-120"/>
+              </a:rPr>
+              <a:t>MICROBIOLOGY   ·   BOARD REVIEW  ·  Q3</a:t>
+            </a:r>
+            <a:endParaRPr lang="en-US" sz="1100" dirty="0"/>
+          </a:p>
+        </p:txBody>
+      </p:sp>
+      <p:sp>
+        <p:nvSpPr>
+          <p:cNvPr id="3" name="Text 1"/>
+          <p:cNvSpPr/>
+          <p:nvPr/>
+        </p:nvSpPr>
+        <p:spPr>
+          <a:xfrm>
+            <a:off x="566928" y="713232"/>
+            <a:ext cx="11064240" cy="749808"/>
+          </a:xfrm>
+          <a:prstGeom prst="rect">
+            <a:avLst/>
+          </a:prstGeom>
+          <a:noFill/>
+          <a:ln/>
+        </p:spPr>
+        <p:txBody>
+          <a:bodyPr wrap="square" lIns="0" tIns="0" rIns="0" bIns="0" rtlCol="0" anchor="ctr"/>
+          <a:lstStyle/>
+          <a:p>
+            <a:pPr algn="l" indent="0" marL="0">
+              <a:buNone/>
+            </a:pPr>
+            <a:r>
+              <a:rPr lang="en-US" sz="2600" b="1" dirty="0">
+                <a:solidFill>
+                  <a:srgbClr val="0E3A5F"/>
+                </a:solidFill>
+                <a:latin typeface="Calibri" pitchFamily="34" charset="0"/>
+                <a:ea typeface="Calibri" pitchFamily="34" charset="-122"/>
+                <a:cs typeface="Calibri" pitchFamily="34" charset="-120"/>
+              </a:rPr>
+              <a:t>Board-Style Review</a:t>
+            </a:r>
+            <a:endParaRPr lang="en-US" sz="2600" dirty="0"/>
+          </a:p>
+        </p:txBody>
+      </p:sp>
+      <p:sp>
+        <p:nvSpPr>
+          <p:cNvPr id="4" name="Text 2"/>
+          <p:cNvSpPr/>
+          <p:nvPr/>
+        </p:nvSpPr>
+        <p:spPr>
+          <a:xfrm>
+            <a:off x="566928" y="1417320"/>
+            <a:ext cx="11057839" cy="914400"/>
+          </a:xfrm>
+          <a:prstGeom prst="rect">
+            <a:avLst/>
+          </a:prstGeom>
+          <a:noFill/>
+          <a:ln/>
+        </p:spPr>
+        <p:txBody>
+          <a:bodyPr wrap="square" lIns="0" tIns="0" rIns="0" bIns="0" rtlCol="0" anchor="t"/>
+          <a:lstStyle/>
+          <a:p>
+            <a:pPr algn="l" indent="0" marL="0">
+              <a:lnSpc>
+                <a:spcPct val="105000"/>
+              </a:lnSpc>
+              <a:buNone/>
+            </a:pPr>
+            <a:r>
+              <a:rPr lang="en-US" sz="1450" b="1" dirty="0">
+                <a:solidFill>
+                  <a:srgbClr val="1B2A38"/>
+                </a:solidFill>
+                <a:latin typeface="Calibri" pitchFamily="34" charset="0"/>
+                <a:ea typeface="Calibri" pitchFamily="34" charset="-122"/>
+                <a:cs typeface="Calibri" pitchFamily="34" charset="-120"/>
+              </a:rPr>
+              <a:t>The single most important determinant of blood-culture sensitivity is:</a:t>
+            </a:r>
+            <a:endParaRPr lang="en-US" sz="1450" dirty="0"/>
+          </a:p>
+        </p:txBody>
+      </p:sp>
+      <p:sp>
+        <p:nvSpPr>
+          <p:cNvPr id="5" name="Text 3"/>
+          <p:cNvSpPr/>
+          <p:nvPr/>
+        </p:nvSpPr>
+        <p:spPr>
+          <a:xfrm>
+            <a:off x="658368" y="2395728"/>
+            <a:ext cx="6192390" cy="3017520"/>
+          </a:xfrm>
+          <a:prstGeom prst="rect">
+            <a:avLst/>
+          </a:prstGeom>
+          <a:noFill/>
+          <a:ln/>
+        </p:spPr>
+        <p:txBody>
+          <a:bodyPr wrap="square" lIns="0" tIns="0" rIns="0" bIns="0" rtlCol="0" anchor="t"/>
+          <a:lstStyle/>
+          <a:p>
+            <a:pPr algn="l" indent="0" marL="0">
+              <a:spcAft>
+                <a:spcPts val="600"/>
+              </a:spcAft>
+              <a:buNone/>
+            </a:pPr>
+            <a:r>
+              <a:rPr lang="en-US" sz="1350" dirty="0">
+                <a:solidFill>
+                  <a:srgbClr val="33444F"/>
+                </a:solidFill>
+                <a:latin typeface="Calibri" pitchFamily="34" charset="0"/>
+                <a:ea typeface="Calibri" pitchFamily="34" charset="-122"/>
+                <a:cs typeface="Calibri" pitchFamily="34" charset="-120"/>
+              </a:rPr>
+              <a:t>A. Skin antiseptic brand</a:t>
+            </a:r>
+            <a:endParaRPr lang="en-US" sz="1350" dirty="0"/>
+          </a:p>
+          <a:p>
+            <a:pPr algn="l" indent="0" marL="0">
+              <a:spcAft>
+                <a:spcPts val="600"/>
+              </a:spcAft>
+              <a:buNone/>
+            </a:pPr>
+            <a:r>
+              <a:rPr lang="en-US" sz="1350" dirty="0">
+                <a:solidFill>
+                  <a:srgbClr val="33444F"/>
+                </a:solidFill>
+                <a:latin typeface="Calibri" pitchFamily="34" charset="0"/>
+                <a:ea typeface="Calibri" pitchFamily="34" charset="-122"/>
+                <a:cs typeface="Calibri" pitchFamily="34" charset="-120"/>
+              </a:rPr>
+              <a:t>B. Bottle color</a:t>
+            </a:r>
+            <a:endParaRPr lang="en-US" sz="1350" dirty="0"/>
+          </a:p>
+          <a:p>
+            <a:pPr algn="l" indent="0" marL="0">
+              <a:spcAft>
+                <a:spcPts val="600"/>
+              </a:spcAft>
+              <a:buNone/>
+            </a:pPr>
+            <a:r>
+              <a:rPr lang="en-US" sz="1350" b="1" dirty="0">
+                <a:solidFill>
+                  <a:srgbClr val="1F5722"/>
+                </a:solidFill>
+                <a:latin typeface="Calibri" pitchFamily="34" charset="0"/>
+                <a:ea typeface="Calibri" pitchFamily="34" charset="-122"/>
+                <a:cs typeface="Calibri" pitchFamily="34" charset="-120"/>
+              </a:rPr>
+              <a:t>C. Volume of blood cultured</a:t>
+            </a:r>
+            <a:endParaRPr lang="en-US" sz="1350" dirty="0"/>
+          </a:p>
+          <a:p>
+            <a:pPr algn="l" indent="0" marL="0">
+              <a:spcAft>
+                <a:spcPts val="600"/>
+              </a:spcAft>
+              <a:buNone/>
+            </a:pPr>
+            <a:r>
+              <a:rPr lang="en-US" sz="1350" dirty="0">
+                <a:solidFill>
+                  <a:srgbClr val="33444F"/>
+                </a:solidFill>
+                <a:latin typeface="Calibri" pitchFamily="34" charset="0"/>
+                <a:ea typeface="Calibri" pitchFamily="34" charset="-122"/>
+                <a:cs typeface="Calibri" pitchFamily="34" charset="-120"/>
+              </a:rPr>
+              <a:t>D. Incubator humidity</a:t>
+            </a:r>
+            <a:endParaRPr lang="en-US" sz="1350" dirty="0"/>
+          </a:p>
+          <a:p>
+            <a:pPr algn="l" indent="0" marL="0">
+              <a:spcAft>
+                <a:spcPts val="600"/>
+              </a:spcAft>
+              <a:buNone/>
+            </a:pPr>
+            <a:r>
+              <a:rPr lang="en-US" sz="1350" dirty="0">
+                <a:solidFill>
+                  <a:srgbClr val="33444F"/>
+                </a:solidFill>
+                <a:latin typeface="Calibri" pitchFamily="34" charset="0"/>
+                <a:ea typeface="Calibri" pitchFamily="34" charset="-122"/>
+                <a:cs typeface="Calibri" pitchFamily="34" charset="-120"/>
+              </a:rPr>
+              <a:t>E. Time of day drawn</a:t>
+            </a:r>
+            <a:endParaRPr lang="en-US" sz="1350" dirty="0"/>
+          </a:p>
+        </p:txBody>
+      </p:sp>
+      <p:sp>
+        <p:nvSpPr>
+          <p:cNvPr id="6" name="Shape 4"/>
+          <p:cNvSpPr/>
+          <p:nvPr/>
+        </p:nvSpPr>
+        <p:spPr>
+          <a:xfrm>
+            <a:off x="7201632" y="2395728"/>
+            <a:ext cx="4423136" cy="3246120"/>
+          </a:xfrm>
+          <a:prstGeom prst="roundRect">
+            <a:avLst>
+              <a:gd name="adj" fmla="val 2535"/>
+            </a:avLst>
+          </a:prstGeom>
+          <a:solidFill>
+            <a:srgbClr val="E8F2E9"/>
+          </a:solidFill>
+          <a:ln/>
+          <a:effectLst>
+            <a:outerShdw sx="100000" sy="100000" kx="0" ky="0" algn="bl" rotWithShape="0" blurRad="88900" dist="25400" dir="5400000">
+              <a:srgbClr val="22303C">
+                <a:alpha val="12000"/>
+              </a:srgbClr>
+            </a:outerShdw>
+          </a:effectLst>
+        </p:spPr>
+        <p:txBody>
+          <a:bodyPr/>
+          <a:p/>
+        </p:txBody>
+      </p:sp>
+      <p:sp>
+        <p:nvSpPr>
+          <p:cNvPr id="7" name="Text 5"/>
+          <p:cNvSpPr/>
+          <p:nvPr/>
+        </p:nvSpPr>
+        <p:spPr>
+          <a:xfrm>
+            <a:off x="7439376" y="2578608"/>
+            <a:ext cx="3965936" cy="457200"/>
+          </a:xfrm>
+          <a:prstGeom prst="rect">
+            <a:avLst/>
+          </a:prstGeom>
+          <a:noFill/>
+          <a:ln/>
+        </p:spPr>
+        <p:txBody>
+          <a:bodyPr wrap="square" lIns="0" tIns="0" rIns="0" bIns="0" rtlCol="0" anchor="ctr"/>
+          <a:lstStyle/>
+          <a:p>
+            <a:pPr indent="0" marL="0">
+              <a:buNone/>
+            </a:pPr>
+            <a:r>
+              <a:rPr lang="en-US" sz="1500" b="1" dirty="0">
+                <a:solidFill>
+                  <a:srgbClr val="2E7D32"/>
+                </a:solidFill>
+                <a:latin typeface="Calibri" pitchFamily="34" charset="0"/>
+                <a:ea typeface="Calibri" pitchFamily="34" charset="-122"/>
+                <a:cs typeface="Calibri" pitchFamily="34" charset="-120"/>
+              </a:rPr>
+              <a:t>ANSWER  </a:t>
+            </a:r>
+            <a:pPr indent="0" marL="0">
+              <a:buNone/>
+            </a:pPr>
+            <a:r>
+              <a:rPr lang="en-US" sz="1500" b="1" dirty="0">
+                <a:solidFill>
+                  <a:srgbClr val="1B2A38"/>
+                </a:solidFill>
+                <a:latin typeface="Calibri" pitchFamily="34" charset="0"/>
+                <a:ea typeface="Calibri" pitchFamily="34" charset="-122"/>
+                <a:cs typeface="Calibri" pitchFamily="34" charset="-120"/>
+              </a:rPr>
+              <a:t>C — Volume of blood cultured</a:t>
+            </a:r>
+            <a:endParaRPr lang="en-US" sz="1500" dirty="0"/>
+          </a:p>
+        </p:txBody>
+      </p:sp>
+      <p:sp>
+        <p:nvSpPr>
+          <p:cNvPr id="8" name="Text 6"/>
+          <p:cNvSpPr/>
+          <p:nvPr/>
+        </p:nvSpPr>
+        <p:spPr>
+          <a:xfrm>
+            <a:off x="7439376" y="3127248"/>
+            <a:ext cx="3947648" cy="2377440"/>
+          </a:xfrm>
+          <a:prstGeom prst="rect">
+            <a:avLst/>
+          </a:prstGeom>
+          <a:noFill/>
+          <a:ln/>
+        </p:spPr>
+        <p:txBody>
+          <a:bodyPr wrap="square" lIns="0" tIns="0" rIns="0" bIns="0" rtlCol="0" anchor="t"/>
+          <a:lstStyle/>
+          <a:p>
+            <a:pPr algn="l" indent="0" marL="0">
+              <a:lnSpc>
+                <a:spcPct val="108000"/>
+              </a:lnSpc>
+              <a:buNone/>
+            </a:pPr>
+            <a:r>
+              <a:rPr lang="en-US" sz="1250" dirty="0">
+                <a:solidFill>
+                  <a:srgbClr val="33444F"/>
+                </a:solidFill>
+                <a:latin typeface="Calibri" pitchFamily="34" charset="0"/>
+                <a:ea typeface="Calibri" pitchFamily="34" charset="-122"/>
+                <a:cs typeface="Calibri" pitchFamily="34" charset="-120"/>
+              </a:rPr>
+              <a:t>Yield is directly related to the blood volume inoculated; inadequate volume is the leading preventable cause of false-negative cultures.</a:t>
+            </a:r>
+            <a:endParaRPr lang="en-US" sz="1250" dirty="0"/>
+          </a:p>
+        </p:txBody>
+      </p:sp>
+      <p:sp>
+        <p:nvSpPr>
+          <p:cNvPr id="9" name="Text 7"/>
+          <p:cNvSpPr/>
+          <p:nvPr/>
+        </p:nvSpPr>
+        <p:spPr>
+          <a:xfrm>
+            <a:off x="566928" y="6473952"/>
+            <a:ext cx="7772400" cy="274320"/>
+          </a:xfrm>
+          <a:prstGeom prst="rect">
+            <a:avLst/>
+          </a:prstGeom>
+          <a:noFill/>
+          <a:ln/>
+        </p:spPr>
+        <p:txBody>
+          <a:bodyPr wrap="square" lIns="0" tIns="0" rIns="0" bIns="0" rtlCol="0" anchor="ctr"/>
+          <a:lstStyle/>
+          <a:p>
+            <a:pPr algn="l" indent="0" marL="0">
+              <a:buNone/>
+            </a:pPr>
+            <a:r>
+              <a:rPr lang="en-US" sz="850" dirty="0">
+                <a:solidFill>
+                  <a:srgbClr val="9AA8B4"/>
+                </a:solidFill>
+                <a:latin typeface="Calibri" pitchFamily="34" charset="0"/>
+                <a:ea typeface="Calibri" pitchFamily="34" charset="-122"/>
+                <a:cs typeface="Calibri" pitchFamily="34" charset="-120"/>
+              </a:rPr>
+              <a:t>Makassed General Hospital  ·  Department of Laboratory Medicine</a:t>
+            </a:r>
+            <a:endParaRPr lang="en-US" sz="850" dirty="0"/>
+          </a:p>
+        </p:txBody>
+      </p:sp>
+      <p:sp>
+        <p:nvSpPr>
+          <p:cNvPr id="10" name="Text 8"/>
+          <p:cNvSpPr/>
+          <p:nvPr/>
+        </p:nvSpPr>
+        <p:spPr>
+          <a:xfrm>
+            <a:off x="9814255" y="6473952"/>
+            <a:ext cx="1828800" cy="274320"/>
+          </a:xfrm>
+          <a:prstGeom prst="rect">
+            <a:avLst/>
+          </a:prstGeom>
+          <a:noFill/>
+          <a:ln/>
+        </p:spPr>
+        <p:txBody>
+          <a:bodyPr wrap="square" lIns="0" tIns="0" rIns="0" bIns="0" rtlCol="0" anchor="ctr"/>
+          <a:lstStyle/>
+          <a:p>
+            <a:pPr algn="r" indent="0" marL="0">
+              <a:buNone/>
+            </a:pPr>
+            <a:r>
+              <a:rPr lang="en-US" sz="850" dirty="0">
+                <a:solidFill>
+                  <a:srgbClr val="9AA8B4"/>
+                </a:solidFill>
+                <a:latin typeface="Calibri" pitchFamily="34" charset="0"/>
+                <a:ea typeface="Calibri" pitchFamily="34" charset="-122"/>
+                <a:cs typeface="Calibri" pitchFamily="34" charset="-120"/>
+              </a:rPr>
+              <a:t>CP Lecture Series</a:t>
+            </a:r>
+            <a:pPr algn="r" indent="0" marL="0">
+              <a:buNone/>
+            </a:pPr>
+            <a:r>
+              <a:rPr lang="en-US" sz="850" dirty="0">
+                <a:solidFill>
+                  <a:srgbClr val="DCE4EC"/>
+                </a:solidFill>
+                <a:latin typeface="Calibri" pitchFamily="34" charset="0"/>
+                <a:ea typeface="Calibri" pitchFamily="34" charset="-122"/>
+                <a:cs typeface="Calibri" pitchFamily="34" charset="-120"/>
+              </a:rPr>
+              <a:t>   ·   </a:t>
+            </a:r>
+            <a:pPr algn="r" indent="0" marL="0">
+              <a:buNone/>
+            </a:pPr>
+            <a:r>
+              <a:rPr lang="en-US" sz="850" b="1" dirty="0">
+                <a:solidFill>
+                  <a:srgbClr val="2E7D32"/>
+                </a:solidFill>
+                <a:latin typeface="Calibri" pitchFamily="34" charset="0"/>
+                <a:ea typeface="Calibri" pitchFamily="34" charset="-122"/>
+                <a:cs typeface="Calibri" pitchFamily="34" charset="-120"/>
+              </a:rPr>
+              <a:t>19</a:t>
+            </a:r>
+            <a:endParaRPr lang="en-US" sz="850" dirty="0"/>
+          </a:p>
+        </p:txBody>
+      </p:sp>
+    </p:spTree>
+  </p:cSld>
+  <p:clrMapOvr>
+    <a:masterClrMapping/>
+  </p:clrMapOvr>
+</p:sld>
+</file>
+
+<file path=ppt/slides/slide28.xml><?xml version="1.0" encoding="utf-8"?>
+<p:sld xmlns:a="http://schemas.openxmlformats.org/drawingml/2006/main" xmlns:p="http://schemas.openxmlformats.org/presentationml/2006/main" xmlns:r="http://schemas.openxmlformats.org/officeDocument/2006/relationships">
+  <p:cSld>
+    <p:spTree>
+      <p:nvGrpSpPr>
+        <p:cNvPr id="1" name=""/>
+        <p:cNvGrpSpPr/>
+        <p:nvPr/>
+      </p:nvGrpSpPr>
+      <p:grpSpPr/>
+      <p:sp>
+        <p:nvSpPr>
+          <p:cNvPr id="2" name="Text 0"/>
+          <p:cNvSpPr/>
+          <p:nvPr/>
+        </p:nvSpPr>
+        <p:spPr>
+          <a:xfrm>
+            <a:off x="566928" y="329184"/>
+            <a:ext cx="10515600" cy="310896"/>
+          </a:xfrm>
+          <a:prstGeom prst="rect">
+            <a:avLst/>
+          </a:prstGeom>
+          <a:noFill/>
+          <a:ln/>
+        </p:spPr>
+        <p:txBody>
+          <a:bodyPr wrap="square" lIns="0" tIns="0" rIns="0" bIns="0" rtlCol="0" anchor="ctr"/>
+          <a:lstStyle/>
+          <a:p>
+            <a:pPr algn="l" indent="0" marL="0">
+              <a:buNone/>
+            </a:pPr>
+            <a:r>
+              <a:rPr lang="en-US" sz="1100" b="1" spc="150" kern="0" dirty="0">
+                <a:solidFill>
+                  <a:srgbClr val="2E7D32"/>
+                </a:solidFill>
+                <a:latin typeface="Calibri" pitchFamily="34" charset="0"/>
+                <a:ea typeface="Calibri" pitchFamily="34" charset="-122"/>
+                <a:cs typeface="Calibri" pitchFamily="34" charset="-120"/>
+              </a:rPr>
+              <a:t>MICROBIOLOGY   ·   BOARD REVIEW  ·  Q2</a:t>
+            </a:r>
+            <a:endParaRPr lang="en-US" sz="1100" dirty="0"/>
+          </a:p>
+        </p:txBody>
+      </p:sp>
+      <p:sp>
+        <p:nvSpPr>
+          <p:cNvPr id="3" name="Text 1"/>
+          <p:cNvSpPr/>
+          <p:nvPr/>
+        </p:nvSpPr>
+        <p:spPr>
+          <a:xfrm>
+            <a:off x="566928" y="713232"/>
+            <a:ext cx="11064240" cy="749808"/>
+          </a:xfrm>
+          <a:prstGeom prst="rect">
+            <a:avLst/>
+          </a:prstGeom>
+          <a:noFill/>
+          <a:ln/>
+        </p:spPr>
+        <p:txBody>
+          <a:bodyPr wrap="square" lIns="0" tIns="0" rIns="0" bIns="0" rtlCol="0" anchor="ctr"/>
+          <a:lstStyle/>
+          <a:p>
+            <a:pPr algn="l" indent="0" marL="0">
+              <a:buNone/>
+            </a:pPr>
+            <a:r>
+              <a:rPr lang="en-US" sz="2600" b="1" dirty="0">
+                <a:solidFill>
+                  <a:srgbClr val="0E3A5F"/>
+                </a:solidFill>
+                <a:latin typeface="Calibri" pitchFamily="34" charset="0"/>
+                <a:ea typeface="Calibri" pitchFamily="34" charset="-122"/>
+                <a:cs typeface="Calibri" pitchFamily="34" charset="-120"/>
+              </a:rPr>
+              <a:t>Board-Style Review</a:t>
+            </a:r>
+            <a:endParaRPr lang="en-US" sz="2600" dirty="0"/>
+          </a:p>
+        </p:txBody>
+      </p:sp>
+      <p:sp>
+        <p:nvSpPr>
+          <p:cNvPr id="4" name="Text 2"/>
+          <p:cNvSpPr/>
+          <p:nvPr/>
+        </p:nvSpPr>
+        <p:spPr>
+          <a:xfrm>
+            <a:off x="566928" y="1417320"/>
+            <a:ext cx="11057839" cy="914400"/>
+          </a:xfrm>
+          <a:prstGeom prst="rect">
+            <a:avLst/>
+          </a:prstGeom>
+          <a:noFill/>
+          <a:ln/>
+        </p:spPr>
+        <p:txBody>
+          <a:bodyPr wrap="square" lIns="0" tIns="0" rIns="0" bIns="0" rtlCol="0" anchor="t"/>
+          <a:lstStyle/>
+          <a:p>
+            <a:pPr algn="l" indent="0" marL="0">
+              <a:lnSpc>
+                <a:spcPct val="105000"/>
+              </a:lnSpc>
+              <a:buNone/>
+            </a:pPr>
+            <a:r>
+              <a:rPr lang="en-US" sz="1450" b="1" dirty="0">
+                <a:solidFill>
+                  <a:srgbClr val="1B2A38"/>
+                </a:solidFill>
+                <a:latin typeface="Calibri" pitchFamily="34" charset="0"/>
+                <a:ea typeface="Calibri" pitchFamily="34" charset="-122"/>
+                <a:cs typeface="Calibri" pitchFamily="34" charset="-120"/>
+              </a:rPr>
+              <a:t>Which specimen should NOT be refrigerated before processing?</a:t>
+            </a:r>
+            <a:endParaRPr lang="en-US" sz="1450" dirty="0"/>
+          </a:p>
+        </p:txBody>
+      </p:sp>
+      <p:sp>
+        <p:nvSpPr>
+          <p:cNvPr id="5" name="Text 3"/>
+          <p:cNvSpPr/>
+          <p:nvPr/>
+        </p:nvSpPr>
+        <p:spPr>
+          <a:xfrm>
+            <a:off x="658368" y="2395728"/>
+            <a:ext cx="6192390" cy="3017520"/>
+          </a:xfrm>
+          <a:prstGeom prst="rect">
+            <a:avLst/>
+          </a:prstGeom>
+          <a:noFill/>
+          <a:ln/>
+        </p:spPr>
+        <p:txBody>
+          <a:bodyPr wrap="square" lIns="0" tIns="0" rIns="0" bIns="0" rtlCol="0" anchor="t"/>
+          <a:lstStyle/>
+          <a:p>
+            <a:pPr algn="l" indent="0" marL="0">
+              <a:spcAft>
+                <a:spcPts val="600"/>
+              </a:spcAft>
+              <a:buNone/>
+            </a:pPr>
+            <a:r>
+              <a:rPr lang="en-US" sz="1350" dirty="0">
+                <a:solidFill>
+                  <a:srgbClr val="33444F"/>
+                </a:solidFill>
+                <a:latin typeface="Calibri" pitchFamily="34" charset="0"/>
+                <a:ea typeface="Calibri" pitchFamily="34" charset="-122"/>
+                <a:cs typeface="Calibri" pitchFamily="34" charset="-120"/>
+              </a:rPr>
+              <a:t>A. Urine for culture</a:t>
+            </a:r>
+            <a:endParaRPr lang="en-US" sz="1350" dirty="0"/>
+          </a:p>
+          <a:p>
+            <a:pPr algn="l" indent="0" marL="0">
+              <a:spcAft>
+                <a:spcPts val="600"/>
+              </a:spcAft>
+              <a:buNone/>
+            </a:pPr>
+            <a:r>
+              <a:rPr lang="en-US" sz="1350" dirty="0">
+                <a:solidFill>
+                  <a:srgbClr val="33444F"/>
+                </a:solidFill>
+                <a:latin typeface="Calibri" pitchFamily="34" charset="0"/>
+                <a:ea typeface="Calibri" pitchFamily="34" charset="-122"/>
+                <a:cs typeface="Calibri" pitchFamily="34" charset="-120"/>
+              </a:rPr>
+              <a:t>B. Stool for routine pathogens</a:t>
+            </a:r>
+            <a:endParaRPr lang="en-US" sz="1350" dirty="0"/>
+          </a:p>
+          <a:p>
+            <a:pPr algn="l" indent="0" marL="0">
+              <a:spcAft>
+                <a:spcPts val="600"/>
+              </a:spcAft>
+              <a:buNone/>
+            </a:pPr>
+            <a:r>
+              <a:rPr lang="en-US" sz="1350" b="1" dirty="0">
+                <a:solidFill>
+                  <a:srgbClr val="1F5722"/>
+                </a:solidFill>
+                <a:latin typeface="Calibri" pitchFamily="34" charset="0"/>
+                <a:ea typeface="Calibri" pitchFamily="34" charset="-122"/>
+                <a:cs typeface="Calibri" pitchFamily="34" charset="-120"/>
+              </a:rPr>
+              <a:t>C. CSF for bacterial culture</a:t>
+            </a:r>
+            <a:endParaRPr lang="en-US" sz="1350" dirty="0"/>
+          </a:p>
+          <a:p>
+            <a:pPr algn="l" indent="0" marL="0">
+              <a:spcAft>
+                <a:spcPts val="600"/>
+              </a:spcAft>
+              <a:buNone/>
+            </a:pPr>
+            <a:r>
+              <a:rPr lang="en-US" sz="1350" dirty="0">
+                <a:solidFill>
+                  <a:srgbClr val="33444F"/>
+                </a:solidFill>
+                <a:latin typeface="Calibri" pitchFamily="34" charset="0"/>
+                <a:ea typeface="Calibri" pitchFamily="34" charset="-122"/>
+                <a:cs typeface="Calibri" pitchFamily="34" charset="-120"/>
+              </a:rPr>
+              <a:t>D. Serum for serology</a:t>
+            </a:r>
+            <a:endParaRPr lang="en-US" sz="1350" dirty="0"/>
+          </a:p>
+          <a:p>
+            <a:pPr algn="l" indent="0" marL="0">
+              <a:spcAft>
+                <a:spcPts val="600"/>
+              </a:spcAft>
+              <a:buNone/>
+            </a:pPr>
+            <a:r>
+              <a:rPr lang="en-US" sz="1350" dirty="0">
+                <a:solidFill>
+                  <a:srgbClr val="33444F"/>
+                </a:solidFill>
+                <a:latin typeface="Calibri" pitchFamily="34" charset="0"/>
+                <a:ea typeface="Calibri" pitchFamily="34" charset="-122"/>
+                <a:cs typeface="Calibri" pitchFamily="34" charset="-120"/>
+              </a:rPr>
+              <a:t>E. Sputum for routine culture</a:t>
+            </a:r>
+            <a:endParaRPr lang="en-US" sz="1350" dirty="0"/>
+          </a:p>
+        </p:txBody>
+      </p:sp>
+      <p:sp>
+        <p:nvSpPr>
+          <p:cNvPr id="6" name="Shape 4"/>
+          <p:cNvSpPr/>
+          <p:nvPr/>
+        </p:nvSpPr>
+        <p:spPr>
+          <a:xfrm>
+            <a:off x="7201632" y="2395728"/>
+            <a:ext cx="4423136" cy="3246120"/>
+          </a:xfrm>
+          <a:prstGeom prst="roundRect">
+            <a:avLst>
+              <a:gd name="adj" fmla="val 2535"/>
+            </a:avLst>
+          </a:prstGeom>
+          <a:solidFill>
+            <a:srgbClr val="E8F2E9"/>
+          </a:solidFill>
+          <a:ln/>
+          <a:effectLst>
+            <a:outerShdw sx="100000" sy="100000" kx="0" ky="0" algn="bl" rotWithShape="0" blurRad="88900" dist="25400" dir="5400000">
+              <a:srgbClr val="22303C">
+                <a:alpha val="12000"/>
+              </a:srgbClr>
+            </a:outerShdw>
+          </a:effectLst>
+        </p:spPr>
+        <p:txBody>
+          <a:bodyPr/>
+          <a:p/>
+        </p:txBody>
+      </p:sp>
+      <p:sp>
+        <p:nvSpPr>
+          <p:cNvPr id="7" name="Text 5"/>
+          <p:cNvSpPr/>
+          <p:nvPr/>
+        </p:nvSpPr>
+        <p:spPr>
+          <a:xfrm>
+            <a:off x="7439376" y="2578608"/>
+            <a:ext cx="3965936" cy="457200"/>
+          </a:xfrm>
+          <a:prstGeom prst="rect">
+            <a:avLst/>
+          </a:prstGeom>
+          <a:noFill/>
+          <a:ln/>
+        </p:spPr>
+        <p:txBody>
+          <a:bodyPr wrap="square" lIns="0" tIns="0" rIns="0" bIns="0" rtlCol="0" anchor="ctr"/>
+          <a:lstStyle/>
+          <a:p>
+            <a:pPr indent="0" marL="0">
+              <a:buNone/>
+            </a:pPr>
+            <a:r>
+              <a:rPr lang="en-US" sz="1500" b="1" dirty="0">
+                <a:solidFill>
+                  <a:srgbClr val="2E7D32"/>
+                </a:solidFill>
+                <a:latin typeface="Calibri" pitchFamily="34" charset="0"/>
+                <a:ea typeface="Calibri" pitchFamily="34" charset="-122"/>
+                <a:cs typeface="Calibri" pitchFamily="34" charset="-120"/>
+              </a:rPr>
+              <a:t>ANSWER  </a:t>
+            </a:r>
+            <a:pPr indent="0" marL="0">
+              <a:buNone/>
+            </a:pPr>
+            <a:r>
+              <a:rPr lang="en-US" sz="1500" b="1" dirty="0">
+                <a:solidFill>
+                  <a:srgbClr val="1B2A38"/>
+                </a:solidFill>
+                <a:latin typeface="Calibri" pitchFamily="34" charset="0"/>
+                <a:ea typeface="Calibri" pitchFamily="34" charset="-122"/>
+                <a:cs typeface="Calibri" pitchFamily="34" charset="-120"/>
+              </a:rPr>
+              <a:t>C — CSF for bacterial culture</a:t>
+            </a:r>
+            <a:endParaRPr lang="en-US" sz="1500" dirty="0"/>
+          </a:p>
+        </p:txBody>
+      </p:sp>
+      <p:sp>
+        <p:nvSpPr>
+          <p:cNvPr id="8" name="Text 6"/>
+          <p:cNvSpPr/>
+          <p:nvPr/>
+        </p:nvSpPr>
+        <p:spPr>
+          <a:xfrm>
+            <a:off x="7439376" y="3127248"/>
+            <a:ext cx="3947648" cy="2377440"/>
+          </a:xfrm>
+          <a:prstGeom prst="rect">
+            <a:avLst/>
+          </a:prstGeom>
+          <a:noFill/>
+          <a:ln/>
+        </p:spPr>
+        <p:txBody>
+          <a:bodyPr wrap="square" lIns="0" tIns="0" rIns="0" bIns="0" rtlCol="0" anchor="t"/>
+          <a:lstStyle/>
+          <a:p>
+            <a:pPr algn="l" indent="0" marL="0">
+              <a:lnSpc>
+                <a:spcPct val="108000"/>
+              </a:lnSpc>
+              <a:buNone/>
+            </a:pPr>
+            <a:r>
+              <a:rPr lang="en-US" sz="1250" dirty="0">
+                <a:solidFill>
+                  <a:srgbClr val="33444F"/>
+                </a:solidFill>
+                <a:latin typeface="Calibri" pitchFamily="34" charset="0"/>
+                <a:ea typeface="Calibri" pitchFamily="34" charset="-122"/>
+                <a:cs typeface="Calibri" pitchFamily="34" charset="-120"/>
+              </a:rPr>
+              <a:t>CSF for bacterial culture should be processed promptly at room temperature to preserve fastidious organisms (e.g., Neisseria, Haemophilus).</a:t>
+            </a:r>
+            <a:endParaRPr lang="en-US" sz="1250" dirty="0"/>
+          </a:p>
+        </p:txBody>
+      </p:sp>
+      <p:sp>
+        <p:nvSpPr>
+          <p:cNvPr id="9" name="Text 7"/>
+          <p:cNvSpPr/>
+          <p:nvPr/>
+        </p:nvSpPr>
+        <p:spPr>
+          <a:xfrm>
+            <a:off x="566928" y="6473952"/>
+            <a:ext cx="7772400" cy="274320"/>
+          </a:xfrm>
+          <a:prstGeom prst="rect">
+            <a:avLst/>
+          </a:prstGeom>
+          <a:noFill/>
+          <a:ln/>
+        </p:spPr>
+        <p:txBody>
+          <a:bodyPr wrap="square" lIns="0" tIns="0" rIns="0" bIns="0" rtlCol="0" anchor="ctr"/>
+          <a:lstStyle/>
+          <a:p>
+            <a:pPr algn="l" indent="0" marL="0">
+              <a:buNone/>
+            </a:pPr>
+            <a:r>
+              <a:rPr lang="en-US" sz="850" dirty="0">
+                <a:solidFill>
+                  <a:srgbClr val="9AA8B4"/>
+                </a:solidFill>
+                <a:latin typeface="Calibri" pitchFamily="34" charset="0"/>
+                <a:ea typeface="Calibri" pitchFamily="34" charset="-122"/>
+                <a:cs typeface="Calibri" pitchFamily="34" charset="-120"/>
+              </a:rPr>
+              <a:t>Makassed General Hospital  ·  Department of Laboratory Medicine</a:t>
+            </a:r>
+            <a:endParaRPr lang="en-US" sz="850" dirty="0"/>
+          </a:p>
+        </p:txBody>
+      </p:sp>
+      <p:sp>
+        <p:nvSpPr>
+          <p:cNvPr id="10" name="Text 8"/>
+          <p:cNvSpPr/>
+          <p:nvPr/>
+        </p:nvSpPr>
+        <p:spPr>
+          <a:xfrm>
+            <a:off x="9814255" y="6473952"/>
+            <a:ext cx="1828800" cy="274320"/>
+          </a:xfrm>
+          <a:prstGeom prst="rect">
+            <a:avLst/>
+          </a:prstGeom>
+          <a:noFill/>
+          <a:ln/>
+        </p:spPr>
+        <p:txBody>
+          <a:bodyPr wrap="square" lIns="0" tIns="0" rIns="0" bIns="0" rtlCol="0" anchor="ctr"/>
+          <a:lstStyle/>
+          <a:p>
+            <a:pPr algn="r" indent="0" marL="0">
+              <a:buNone/>
+            </a:pPr>
+            <a:r>
+              <a:rPr lang="en-US" sz="850" dirty="0">
+                <a:solidFill>
+                  <a:srgbClr val="9AA8B4"/>
+                </a:solidFill>
+                <a:latin typeface="Calibri" pitchFamily="34" charset="0"/>
+                <a:ea typeface="Calibri" pitchFamily="34" charset="-122"/>
+                <a:cs typeface="Calibri" pitchFamily="34" charset="-120"/>
+              </a:rPr>
+              <a:t>CP Lecture Series</a:t>
+            </a:r>
+            <a:pPr algn="r" indent="0" marL="0">
+              <a:buNone/>
+            </a:pPr>
+            <a:r>
+              <a:rPr lang="en-US" sz="850" dirty="0">
+                <a:solidFill>
+                  <a:srgbClr val="DCE4EC"/>
+                </a:solidFill>
+                <a:latin typeface="Calibri" pitchFamily="34" charset="0"/>
+                <a:ea typeface="Calibri" pitchFamily="34" charset="-122"/>
+                <a:cs typeface="Calibri" pitchFamily="34" charset="-120"/>
+              </a:rPr>
+              <a:t>   ·   </a:t>
+            </a:r>
+            <a:pPr algn="r" indent="0" marL="0">
+              <a:buNone/>
+            </a:pPr>
+            <a:r>
+              <a:rPr lang="en-US" sz="850" b="1" dirty="0">
+                <a:solidFill>
+                  <a:srgbClr val="2E7D32"/>
+                </a:solidFill>
+                <a:latin typeface="Calibri" pitchFamily="34" charset="0"/>
+                <a:ea typeface="Calibri" pitchFamily="34" charset="-122"/>
+                <a:cs typeface="Calibri" pitchFamily="34" charset="-120"/>
+              </a:rPr>
+              <a:t>18</a:t>
+            </a:r>
+            <a:endParaRPr lang="en-US" sz="850" dirty="0"/>
+          </a:p>
+        </p:txBody>
+      </p:sp>
+    </p:spTree>
+  </p:cSld>
+  <p:clrMapOvr>
+    <a:masterClrMapping/>
+  </p:clrMapOvr>
+</p:sld>
+</file>
+
+<file path=ppt/slides/slide29.xml><?xml version="1.0" encoding="utf-8"?>
+<p:sld xmlns:a="http://schemas.openxmlformats.org/drawingml/2006/main" xmlns:p="http://schemas.openxmlformats.org/presentationml/2006/main" xmlns:r="http://schemas.openxmlformats.org/officeDocument/2006/relationships">
+  <p:cSld>
+    <p:spTree>
+      <p:nvGrpSpPr>
+        <p:cNvPr id="1" name=""/>
+        <p:cNvGrpSpPr/>
+        <p:nvPr/>
+      </p:nvGrpSpPr>
+      <p:grpSpPr/>
+      <p:sp>
+        <p:nvSpPr>
+          <p:cNvPr id="2" name="Text 0"/>
+          <p:cNvSpPr/>
+          <p:nvPr/>
+        </p:nvSpPr>
+        <p:spPr>
+          <a:xfrm>
+            <a:off x="566928" y="329184"/>
+            <a:ext cx="10515600" cy="310896"/>
+          </a:xfrm>
+          <a:prstGeom prst="rect">
+            <a:avLst/>
+          </a:prstGeom>
+          <a:noFill/>
+          <a:ln/>
+        </p:spPr>
+        <p:txBody>
+          <a:bodyPr wrap="square" lIns="0" tIns="0" rIns="0" bIns="0" rtlCol="0" anchor="ctr"/>
+          <a:lstStyle/>
+          <a:p>
+            <a:pPr algn="l" indent="0" marL="0">
+              <a:buNone/>
+            </a:pPr>
+            <a:r>
+              <a:rPr lang="en-US" sz="1100" b="1" spc="150" kern="0" dirty="0">
+                <a:solidFill>
+                  <a:srgbClr val="2E7D32"/>
+                </a:solidFill>
+                <a:latin typeface="Calibri" pitchFamily="34" charset="0"/>
+                <a:ea typeface="Calibri" pitchFamily="34" charset="-122"/>
+                <a:cs typeface="Calibri" pitchFamily="34" charset="-120"/>
+              </a:rPr>
+              <a:t>MICROBIOLOGY   ·   BOARD REVIEW  ·  Q1</a:t>
+            </a:r>
+            <a:endParaRPr lang="en-US" sz="1100" dirty="0"/>
+          </a:p>
+        </p:txBody>
+      </p:sp>
+      <p:sp>
+        <p:nvSpPr>
+          <p:cNvPr id="3" name="Text 1"/>
+          <p:cNvSpPr/>
+          <p:nvPr/>
+        </p:nvSpPr>
+        <p:spPr>
+          <a:xfrm>
+            <a:off x="566928" y="713232"/>
+            <a:ext cx="11064240" cy="749808"/>
+          </a:xfrm>
+          <a:prstGeom prst="rect">
+            <a:avLst/>
+          </a:prstGeom>
+          <a:noFill/>
+          <a:ln/>
+        </p:spPr>
+        <p:txBody>
+          <a:bodyPr wrap="square" lIns="0" tIns="0" rIns="0" bIns="0" rtlCol="0" anchor="ctr"/>
+          <a:lstStyle/>
+          <a:p>
+            <a:pPr algn="l" indent="0" marL="0">
+              <a:buNone/>
+            </a:pPr>
+            <a:r>
+              <a:rPr lang="en-US" sz="2600" b="1" dirty="0">
+                <a:solidFill>
+                  <a:srgbClr val="0E3A5F"/>
+                </a:solidFill>
+                <a:latin typeface="Calibri" pitchFamily="34" charset="0"/>
+                <a:ea typeface="Calibri" pitchFamily="34" charset="-122"/>
+                <a:cs typeface="Calibri" pitchFamily="34" charset="-120"/>
+              </a:rPr>
+              <a:t>Board-Style Review</a:t>
+            </a:r>
+            <a:endParaRPr lang="en-US" sz="2600" dirty="0"/>
+          </a:p>
+        </p:txBody>
+      </p:sp>
+      <p:sp>
+        <p:nvSpPr>
+          <p:cNvPr id="4" name="Text 2"/>
+          <p:cNvSpPr/>
+          <p:nvPr/>
+        </p:nvSpPr>
+        <p:spPr>
+          <a:xfrm>
+            <a:off x="566928" y="1417320"/>
+            <a:ext cx="11057839" cy="914400"/>
+          </a:xfrm>
+          <a:prstGeom prst="rect">
+            <a:avLst/>
+          </a:prstGeom>
+          <a:noFill/>
+          <a:ln/>
+        </p:spPr>
+        <p:txBody>
+          <a:bodyPr wrap="square" lIns="0" tIns="0" rIns="0" bIns="0" rtlCol="0" anchor="t"/>
+          <a:lstStyle/>
+          <a:p>
+            <a:pPr algn="l" indent="0" marL="0">
+              <a:lnSpc>
+                <a:spcPct val="105000"/>
+              </a:lnSpc>
+              <a:buNone/>
+            </a:pPr>
+            <a:r>
+              <a:rPr lang="en-US" sz="1450" b="1" dirty="0">
+                <a:solidFill>
+                  <a:srgbClr val="1B2A38"/>
+                </a:solidFill>
+                <a:latin typeface="Calibri" pitchFamily="34" charset="0"/>
+                <a:ea typeface="Calibri" pitchFamily="34" charset="-122"/>
+                <a:cs typeface="Calibri" pitchFamily="34" charset="-120"/>
+              </a:rPr>
+              <a:t>Which sputum Gram-stain finding best indicates a specimen suitable for culture?</a:t>
+            </a:r>
+            <a:endParaRPr lang="en-US" sz="1450" dirty="0"/>
+          </a:p>
+        </p:txBody>
+      </p:sp>
+      <p:sp>
+        <p:nvSpPr>
+          <p:cNvPr id="5" name="Text 3"/>
+          <p:cNvSpPr/>
+          <p:nvPr/>
+        </p:nvSpPr>
+        <p:spPr>
+          <a:xfrm>
+            <a:off x="658368" y="2395728"/>
+            <a:ext cx="6192390" cy="3017520"/>
+          </a:xfrm>
+          <a:prstGeom prst="rect">
+            <a:avLst/>
+          </a:prstGeom>
+          <a:noFill/>
+          <a:ln/>
+        </p:spPr>
+        <p:txBody>
+          <a:bodyPr wrap="square" lIns="0" tIns="0" rIns="0" bIns="0" rtlCol="0" anchor="t"/>
+          <a:lstStyle/>
+          <a:p>
+            <a:pPr algn="l" indent="0" marL="0">
+              <a:spcAft>
+                <a:spcPts val="600"/>
+              </a:spcAft>
+              <a:buNone/>
+            </a:pPr>
+            <a:r>
+              <a:rPr lang="en-US" sz="1350" dirty="0">
+                <a:solidFill>
+                  <a:srgbClr val="33444F"/>
+                </a:solidFill>
+                <a:latin typeface="Calibri" pitchFamily="34" charset="0"/>
+                <a:ea typeface="Calibri" pitchFamily="34" charset="-122"/>
+                <a:cs typeface="Calibri" pitchFamily="34" charset="-120"/>
+              </a:rPr>
+              <a:t>A. Many squamous epithelial cells</a:t>
+            </a:r>
+            <a:endParaRPr lang="en-US" sz="1350" dirty="0"/>
+          </a:p>
+          <a:p>
+            <a:pPr algn="l" indent="0" marL="0">
+              <a:spcAft>
+                <a:spcPts val="600"/>
+              </a:spcAft>
+              <a:buNone/>
+            </a:pPr>
+            <a:r>
+              <a:rPr lang="en-US" sz="1350" b="1" dirty="0">
+                <a:solidFill>
+                  <a:srgbClr val="1F5722"/>
+                </a:solidFill>
+                <a:latin typeface="Calibri" pitchFamily="34" charset="0"/>
+                <a:ea typeface="Calibri" pitchFamily="34" charset="-122"/>
+                <a:cs typeface="Calibri" pitchFamily="34" charset="-120"/>
+              </a:rPr>
+              <a:t>B. Many polymorphonuclear cells with few squamous cells</a:t>
+            </a:r>
+            <a:endParaRPr lang="en-US" sz="1350" dirty="0"/>
+          </a:p>
+          <a:p>
+            <a:pPr algn="l" indent="0" marL="0">
+              <a:spcAft>
+                <a:spcPts val="600"/>
+              </a:spcAft>
+              <a:buNone/>
+            </a:pPr>
+            <a:r>
+              <a:rPr lang="en-US" sz="1350" dirty="0">
+                <a:solidFill>
+                  <a:srgbClr val="33444F"/>
+                </a:solidFill>
+                <a:latin typeface="Calibri" pitchFamily="34" charset="0"/>
+                <a:ea typeface="Calibri" pitchFamily="34" charset="-122"/>
+                <a:cs typeface="Calibri" pitchFamily="34" charset="-120"/>
+              </a:rPr>
+              <a:t>C. No cells at all</a:t>
+            </a:r>
+            <a:endParaRPr lang="en-US" sz="1350" dirty="0"/>
+          </a:p>
+          <a:p>
+            <a:pPr algn="l" indent="0" marL="0">
+              <a:spcAft>
+                <a:spcPts val="600"/>
+              </a:spcAft>
+              <a:buNone/>
+            </a:pPr>
+            <a:r>
+              <a:rPr lang="en-US" sz="1350" dirty="0">
+                <a:solidFill>
+                  <a:srgbClr val="33444F"/>
+                </a:solidFill>
+                <a:latin typeface="Calibri" pitchFamily="34" charset="0"/>
+                <a:ea typeface="Calibri" pitchFamily="34" charset="-122"/>
+                <a:cs typeface="Calibri" pitchFamily="34" charset="-120"/>
+              </a:rPr>
+              <a:t>D. Mixed oral flora</a:t>
+            </a:r>
+            <a:endParaRPr lang="en-US" sz="1350" dirty="0"/>
+          </a:p>
+          <a:p>
+            <a:pPr algn="l" indent="0" marL="0">
+              <a:spcAft>
+                <a:spcPts val="600"/>
+              </a:spcAft>
+              <a:buNone/>
+            </a:pPr>
+            <a:r>
+              <a:rPr lang="en-US" sz="1350" dirty="0">
+                <a:solidFill>
+                  <a:srgbClr val="33444F"/>
+                </a:solidFill>
+                <a:latin typeface="Calibri" pitchFamily="34" charset="0"/>
+                <a:ea typeface="Calibri" pitchFamily="34" charset="-122"/>
+                <a:cs typeface="Calibri" pitchFamily="34" charset="-120"/>
+              </a:rPr>
+              <a:t>E. Yeast only</a:t>
+            </a:r>
+            <a:endParaRPr lang="en-US" sz="1350" dirty="0"/>
+          </a:p>
+        </p:txBody>
+      </p:sp>
+      <p:sp>
+        <p:nvSpPr>
+          <p:cNvPr id="6" name="Shape 4"/>
+          <p:cNvSpPr/>
+          <p:nvPr/>
+        </p:nvSpPr>
+        <p:spPr>
+          <a:xfrm>
+            <a:off x="7201632" y="2395728"/>
+            <a:ext cx="4423136" cy="3246120"/>
+          </a:xfrm>
+          <a:prstGeom prst="roundRect">
+            <a:avLst>
+              <a:gd name="adj" fmla="val 2535"/>
+            </a:avLst>
+          </a:prstGeom>
+          <a:solidFill>
+            <a:srgbClr val="E8F2E9"/>
+          </a:solidFill>
+          <a:ln/>
+          <a:effectLst>
+            <a:outerShdw sx="100000" sy="100000" kx="0" ky="0" algn="bl" rotWithShape="0" blurRad="88900" dist="25400" dir="5400000">
+              <a:srgbClr val="22303C">
+                <a:alpha val="12000"/>
+              </a:srgbClr>
+            </a:outerShdw>
+          </a:effectLst>
+        </p:spPr>
+        <p:txBody>
+          <a:bodyPr/>
+          <a:p/>
+        </p:txBody>
+      </p:sp>
+      <p:sp>
+        <p:nvSpPr>
+          <p:cNvPr id="7" name="Text 5"/>
+          <p:cNvSpPr/>
+          <p:nvPr/>
+        </p:nvSpPr>
+        <p:spPr>
+          <a:xfrm>
+            <a:off x="7439376" y="2578608"/>
+            <a:ext cx="3965936" cy="457200"/>
+          </a:xfrm>
+          <a:prstGeom prst="rect">
+            <a:avLst/>
+          </a:prstGeom>
+          <a:noFill/>
+          <a:ln/>
+        </p:spPr>
+        <p:txBody>
+          <a:bodyPr wrap="square" lIns="0" tIns="0" rIns="0" bIns="0" rtlCol="0" anchor="ctr"/>
+          <a:lstStyle/>
+          <a:p>
+            <a:pPr indent="0" marL="0">
+              <a:buNone/>
+            </a:pPr>
+            <a:r>
+              <a:rPr lang="en-US" sz="1500" b="1" dirty="0">
+                <a:solidFill>
+                  <a:srgbClr val="2E7D32"/>
+                </a:solidFill>
+                <a:latin typeface="Calibri" pitchFamily="34" charset="0"/>
+                <a:ea typeface="Calibri" pitchFamily="34" charset="-122"/>
+                <a:cs typeface="Calibri" pitchFamily="34" charset="-120"/>
+              </a:rPr>
+              <a:t>ANSWER  </a:t>
+            </a:r>
+            <a:pPr indent="0" marL="0">
+              <a:buNone/>
+            </a:pPr>
+            <a:r>
+              <a:rPr lang="en-US" sz="1500" b="1" dirty="0">
+                <a:solidFill>
+                  <a:srgbClr val="1B2A38"/>
+                </a:solidFill>
+                <a:latin typeface="Calibri" pitchFamily="34" charset="0"/>
+                <a:ea typeface="Calibri" pitchFamily="34" charset="-122"/>
+                <a:cs typeface="Calibri" pitchFamily="34" charset="-120"/>
+              </a:rPr>
+              <a:t>B — Many PMNs, few squamous cells</a:t>
+            </a:r>
+            <a:endParaRPr lang="en-US" sz="1500" dirty="0"/>
+          </a:p>
+        </p:txBody>
+      </p:sp>
+      <p:sp>
+        <p:nvSpPr>
+          <p:cNvPr id="8" name="Text 6"/>
+          <p:cNvSpPr/>
+          <p:nvPr/>
+        </p:nvSpPr>
+        <p:spPr>
+          <a:xfrm>
+            <a:off x="7439376" y="3127248"/>
+            <a:ext cx="3947648" cy="2377440"/>
+          </a:xfrm>
+          <a:prstGeom prst="rect">
+            <a:avLst/>
+          </a:prstGeom>
+          <a:noFill/>
+          <a:ln/>
+        </p:spPr>
+        <p:txBody>
+          <a:bodyPr wrap="square" lIns="0" tIns="0" rIns="0" bIns="0" rtlCol="0" anchor="t"/>
+          <a:lstStyle/>
+          <a:p>
+            <a:pPr algn="l" indent="0" marL="0">
+              <a:lnSpc>
+                <a:spcPct val="108000"/>
+              </a:lnSpc>
+              <a:buNone/>
+            </a:pPr>
+            <a:r>
+              <a:rPr lang="en-US" sz="1250" dirty="0">
+                <a:solidFill>
+                  <a:srgbClr val="33444F"/>
+                </a:solidFill>
+                <a:latin typeface="Calibri" pitchFamily="34" charset="0"/>
+                <a:ea typeface="Calibri" pitchFamily="34" charset="-122"/>
+                <a:cs typeface="Calibri" pitchFamily="34" charset="-120"/>
+              </a:rPr>
+              <a:t>PMNs with few squamous epithelial cells indicate a true lower-respiratory specimen; abundant squamous cells indicate saliva.</a:t>
+            </a:r>
+            <a:endParaRPr lang="en-US" sz="1250" dirty="0"/>
+          </a:p>
+        </p:txBody>
+      </p:sp>
+      <p:sp>
+        <p:nvSpPr>
+          <p:cNvPr id="9" name="Text 7"/>
+          <p:cNvSpPr/>
+          <p:nvPr/>
+        </p:nvSpPr>
+        <p:spPr>
+          <a:xfrm>
+            <a:off x="566928" y="6473952"/>
+            <a:ext cx="7772400" cy="274320"/>
+          </a:xfrm>
+          <a:prstGeom prst="rect">
+            <a:avLst/>
+          </a:prstGeom>
+          <a:noFill/>
+          <a:ln/>
+        </p:spPr>
+        <p:txBody>
+          <a:bodyPr wrap="square" lIns="0" tIns="0" rIns="0" bIns="0" rtlCol="0" anchor="ctr"/>
+          <a:lstStyle/>
+          <a:p>
+            <a:pPr algn="l" indent="0" marL="0">
+              <a:buNone/>
+            </a:pPr>
+            <a:r>
+              <a:rPr lang="en-US" sz="850" dirty="0">
+                <a:solidFill>
+                  <a:srgbClr val="9AA8B4"/>
+                </a:solidFill>
+                <a:latin typeface="Calibri" pitchFamily="34" charset="0"/>
+                <a:ea typeface="Calibri" pitchFamily="34" charset="-122"/>
+                <a:cs typeface="Calibri" pitchFamily="34" charset="-120"/>
+              </a:rPr>
+              <a:t>Makassed General Hospital  ·  Department of Laboratory Medicine</a:t>
+            </a:r>
+            <a:endParaRPr lang="en-US" sz="850" dirty="0"/>
+          </a:p>
+        </p:txBody>
+      </p:sp>
+      <p:sp>
+        <p:nvSpPr>
+          <p:cNvPr id="10" name="Text 8"/>
+          <p:cNvSpPr/>
+          <p:nvPr/>
+        </p:nvSpPr>
+        <p:spPr>
+          <a:xfrm>
+            <a:off x="9814255" y="6473952"/>
+            <a:ext cx="1828800" cy="274320"/>
+          </a:xfrm>
+          <a:prstGeom prst="rect">
+            <a:avLst/>
+          </a:prstGeom>
+          <a:noFill/>
+          <a:ln/>
+        </p:spPr>
+        <p:txBody>
+          <a:bodyPr wrap="square" lIns="0" tIns="0" rIns="0" bIns="0" rtlCol="0" anchor="ctr"/>
+          <a:lstStyle/>
+          <a:p>
+            <a:pPr algn="r" indent="0" marL="0">
+              <a:buNone/>
+            </a:pPr>
+            <a:r>
+              <a:rPr lang="en-US" sz="850" dirty="0">
+                <a:solidFill>
+                  <a:srgbClr val="9AA8B4"/>
+                </a:solidFill>
+                <a:latin typeface="Calibri" pitchFamily="34" charset="0"/>
+                <a:ea typeface="Calibri" pitchFamily="34" charset="-122"/>
+                <a:cs typeface="Calibri" pitchFamily="34" charset="-120"/>
+              </a:rPr>
+              <a:t>CP Lecture Series</a:t>
+            </a:r>
+            <a:pPr algn="r" indent="0" marL="0">
+              <a:buNone/>
+            </a:pPr>
+            <a:r>
+              <a:rPr lang="en-US" sz="850" dirty="0">
+                <a:solidFill>
+                  <a:srgbClr val="DCE4EC"/>
+                </a:solidFill>
+                <a:latin typeface="Calibri" pitchFamily="34" charset="0"/>
+                <a:ea typeface="Calibri" pitchFamily="34" charset="-122"/>
+                <a:cs typeface="Calibri" pitchFamily="34" charset="-120"/>
+              </a:rPr>
+              <a:t>   ·   </a:t>
+            </a:r>
+            <a:pPr algn="r" indent="0" marL="0">
+              <a:buNone/>
+            </a:pPr>
+            <a:r>
+              <a:rPr lang="en-US" sz="850" b="1" dirty="0">
+                <a:solidFill>
+                  <a:srgbClr val="2E7D32"/>
+                </a:solidFill>
+                <a:latin typeface="Calibri" pitchFamily="34" charset="0"/>
+                <a:ea typeface="Calibri" pitchFamily="34" charset="-122"/>
+                <a:cs typeface="Calibri" pitchFamily="34" charset="-120"/>
+              </a:rPr>
+              <a:t>17</a:t>
+            </a:r>
+            <a:endParaRPr lang="en-US" sz="850" dirty="0"/>
+          </a:p>
+        </p:txBody>
+      </p:sp>
+    </p:spTree>
+  </p:cSld>
+  <p:clrMapOvr>
+    <a:masterClrMapping/>
+  </p:clrMapOvr>
+</p:sld>
+</file>
+
 <file path=ppt/slides/slide3.xml><?xml version="1.0" encoding="utf-8"?>
 <p:sld xmlns:a="http://schemas.openxmlformats.org/drawingml/2006/main" xmlns:r="http://schemas.openxmlformats.org/officeDocument/2006/relationships" xmlns:p="http://schemas.openxmlformats.org/presentationml/2006/main">
   <p:cSld name="Slide 3">
@@ -12760,6 +14376,10 @@
             </a:outerShdw>
           </a:effectLst>
         </p:spPr>
+        <p:txBody>
+          <a:bodyPr/>
+          <a:p/>
+        </p:txBody>
       </p:sp>
       <p:sp>
         <p:nvSpPr>
@@ -12787,6 +14407,10 @@
             </a:outerShdw>
           </a:effectLst>
         </p:spPr>
+        <p:txBody>
+          <a:bodyPr/>
+          <a:p/>
+        </p:txBody>
       </p:sp>
       <p:sp>
         <p:nvSpPr>
@@ -12894,6 +14518,10 @@
             </a:outerShdw>
           </a:effectLst>
         </p:spPr>
+        <p:txBody>
+          <a:bodyPr/>
+          <a:p/>
+        </p:txBody>
       </p:sp>
       <p:sp>
         <p:nvSpPr>
@@ -12921,6 +14549,10 @@
             </a:outerShdw>
           </a:effectLst>
         </p:spPr>
+        <p:txBody>
+          <a:bodyPr/>
+          <a:p/>
+        </p:txBody>
       </p:sp>
       <p:sp>
         <p:nvSpPr>
@@ -13028,6 +14660,10 @@
             </a:outerShdw>
           </a:effectLst>
         </p:spPr>
+        <p:txBody>
+          <a:bodyPr/>
+          <a:p/>
+        </p:txBody>
       </p:sp>
       <p:sp>
         <p:nvSpPr>
@@ -13055,6 +14691,10 @@
             </a:outerShdw>
           </a:effectLst>
         </p:spPr>
+        <p:txBody>
+          <a:bodyPr/>
+          <a:p/>
+        </p:txBody>
       </p:sp>
       <p:sp>
         <p:nvSpPr>
@@ -13162,6 +14802,10 @@
             </a:outerShdw>
           </a:effectLst>
         </p:spPr>
+        <p:txBody>
+          <a:bodyPr/>
+          <a:p/>
+        </p:txBody>
       </p:sp>
       <p:sp>
         <p:nvSpPr>
@@ -13189,6 +14833,10 @@
             </a:outerShdw>
           </a:effectLst>
         </p:spPr>
+        <p:txBody>
+          <a:bodyPr/>
+          <a:p/>
+        </p:txBody>
       </p:sp>
       <p:sp>
         <p:nvSpPr>
@@ -13296,6 +14944,10 @@
             </a:outerShdw>
           </a:effectLst>
         </p:spPr>
+        <p:txBody>
+          <a:bodyPr/>
+          <a:p/>
+        </p:txBody>
       </p:sp>
       <p:sp>
         <p:nvSpPr>
@@ -13323,6 +14975,10 @@
             </a:outerShdw>
           </a:effectLst>
         </p:spPr>
+        <p:txBody>
+          <a:bodyPr/>
+          <a:p/>
+        </p:txBody>
       </p:sp>
       <p:sp>
         <p:nvSpPr>
@@ -13430,6 +15086,10 @@
             </a:outerShdw>
           </a:effectLst>
         </p:spPr>
+        <p:txBody>
+          <a:bodyPr/>
+          <a:p/>
+        </p:txBody>
       </p:sp>
       <p:sp>
         <p:nvSpPr>
@@ -13457,6 +15117,10 @@
             </a:outerShdw>
           </a:effectLst>
         </p:spPr>
+        <p:txBody>
+          <a:bodyPr/>
+          <a:p/>
+        </p:txBody>
       </p:sp>
       <p:sp>
         <p:nvSpPr>
@@ -13780,6 +15444,10 @@
             </a:outerShdw>
           </a:effectLst>
         </p:spPr>
+        <p:txBody>
+          <a:bodyPr/>
+          <a:p/>
+        </p:txBody>
       </p:sp>
       <p:sp>
         <p:nvSpPr>
@@ -13807,6 +15475,10 @@
             </a:outerShdw>
           </a:effectLst>
         </p:spPr>
+        <p:txBody>
+          <a:bodyPr/>
+          <a:p/>
+        </p:txBody>
       </p:sp>
       <p:sp>
         <p:nvSpPr>
@@ -13921,6 +15593,10 @@
           </a:solidFill>
           <a:ln/>
         </p:spPr>
+        <p:txBody>
+          <a:bodyPr/>
+          <a:p/>
+        </p:txBody>
       </p:sp>
       <p:sp>
         <p:nvSpPr>
@@ -13948,6 +15624,10 @@
             </a:outerShdw>
           </a:effectLst>
         </p:spPr>
+        <p:txBody>
+          <a:bodyPr/>
+          <a:p/>
+        </p:txBody>
       </p:sp>
       <p:sp>
         <p:nvSpPr>
@@ -14069,6 +15749,10 @@
             </a:outerShdw>
           </a:effectLst>
         </p:spPr>
+        <p:txBody>
+          <a:bodyPr/>
+          <a:p/>
+        </p:txBody>
       </p:sp>
       <p:sp>
         <p:nvSpPr>
@@ -14096,6 +15780,10 @@
             </a:outerShdw>
           </a:effectLst>
         </p:spPr>
+        <p:txBody>
+          <a:bodyPr/>
+          <a:p/>
+        </p:txBody>
       </p:sp>
       <p:sp>
         <p:nvSpPr>
@@ -14210,6 +15898,10 @@
           </a:solidFill>
           <a:ln/>
         </p:spPr>
+        <p:txBody>
+          <a:bodyPr/>
+          <a:p/>
+        </p:txBody>
       </p:sp>
       <p:sp>
         <p:nvSpPr>
@@ -14237,6 +15929,10 @@
             </a:outerShdw>
           </a:effectLst>
         </p:spPr>
+        <p:txBody>
+          <a:bodyPr/>
+          <a:p/>
+        </p:txBody>
       </p:sp>
       <p:sp>
         <p:nvSpPr>
@@ -14358,6 +16054,10 @@
             </a:outerShdw>
           </a:effectLst>
         </p:spPr>
+        <p:txBody>
+          <a:bodyPr/>
+          <a:p/>
+        </p:txBody>
       </p:sp>
       <p:sp>
         <p:nvSpPr>
@@ -14385,6 +16085,10 @@
             </a:outerShdw>
           </a:effectLst>
         </p:spPr>
+        <p:txBody>
+          <a:bodyPr/>
+          <a:p/>
+        </p:txBody>
       </p:sp>
       <p:sp>
         <p:nvSpPr>
@@ -14623,6 +16327,10 @@
           </a:solidFill>
           <a:ln/>
         </p:spPr>
+        <p:txBody>
+          <a:bodyPr/>
+          <a:p/>
+        </p:txBody>
       </p:sp>
       <p:sp>
         <p:nvSpPr>
@@ -14645,6 +16353,10 @@
           </a:solidFill>
           <a:ln/>
         </p:spPr>
+        <p:txBody>
+          <a:bodyPr/>
+          <a:p/>
+        </p:txBody>
       </p:sp>
       <p:sp>
         <p:nvSpPr>
@@ -14906,6 +16618,10 @@
             </a:outerShdw>
           </a:effectLst>
         </p:spPr>
+        <p:txBody>
+          <a:bodyPr/>
+          <a:p/>
+        </p:txBody>
       </p:sp>
       <p:pic>
         <p:nvPicPr>
@@ -15214,6 +16930,10 @@
             </a:outerShdw>
           </a:effectLst>
         </p:spPr>
+        <p:txBody>
+          <a:bodyPr/>
+          <a:p/>
+        </p:txBody>
       </p:sp>
       <p:sp>
         <p:nvSpPr>
@@ -15388,6 +17108,10 @@
             </a:outerShdw>
           </a:effectLst>
         </p:spPr>
+        <p:txBody>
+          <a:bodyPr/>
+          <a:p/>
+        </p:txBody>
       </p:sp>
       <p:sp>
         <p:nvSpPr>
@@ -15778,6 +17502,10 @@
             </a:outerShdw>
           </a:effectLst>
         </p:spPr>
+        <p:txBody>
+          <a:bodyPr/>
+          <a:p/>
+        </p:txBody>
       </p:sp>
       <p:sp>
         <p:nvSpPr>
@@ -15952,6 +17680,10 @@
             </a:outerShdw>
           </a:effectLst>
         </p:spPr>
+        <p:txBody>
+          <a:bodyPr/>
+          <a:p/>
+        </p:txBody>
       </p:sp>
       <p:sp>
         <p:nvSpPr>
@@ -16257,6 +17989,10 @@
           </a:solidFill>
           <a:ln/>
         </p:spPr>
+        <p:txBody>
+          <a:bodyPr/>
+          <a:p/>
+        </p:txBody>
       </p:sp>
       <p:sp>
         <p:nvSpPr>
@@ -16279,6 +18015,10 @@
           </a:solidFill>
           <a:ln/>
         </p:spPr>
+        <p:txBody>
+          <a:bodyPr/>
+          <a:p/>
+        </p:txBody>
       </p:sp>
       <p:sp>
         <p:nvSpPr>
